--- a/Presentaciones/data_equipo_08.pptx
+++ b/Presentaciones/data_equipo_08.pptx
@@ -3565,7 +3565,15 @@
             </a:pPr>
             <a:r>
               <a:rPr lang="es-CO" b="1" dirty="0" smtClean="0"/>
-              <a:t>Limpieza de datos, transformación de variables, definición de bases de datos finales.</a:t>
+              <a:t>Limpieza de datos, </a:t>
+            </a:r>
+            <a:r>
+              <a:rPr lang="es-CO" b="1" dirty="0" smtClean="0"/>
+              <a:t>construcción y transformación </a:t>
+            </a:r>
+            <a:r>
+              <a:rPr lang="es-CO" b="1" dirty="0" smtClean="0"/>
+              <a:t>de variables, definición de bases de datos finales.</a:t>
             </a:r>
             <a:endParaRPr lang="es-CO" b="1" dirty="0"/>
           </a:p>
@@ -3649,6 +3657,95 @@
           <a:lstStyle/>
           <a:p>
             <a:endParaRPr lang="es-CO"/>
+          </a:p>
+        </p:txBody>
+      </p:sp>
+      <p:sp>
+        <p:nvSpPr>
+          <p:cNvPr id="3" name="Rectángulo 2"/>
+          <p:cNvSpPr/>
+          <p:nvPr/>
+        </p:nvSpPr>
+        <p:spPr>
+          <a:xfrm>
+            <a:off x="4732527" y="1489061"/>
+            <a:ext cx="4572000" cy="1477328"/>
+          </a:xfrm>
+          <a:prstGeom prst="rect">
+            <a:avLst/>
+          </a:prstGeom>
+        </p:spPr>
+        <p:txBody>
+          <a:bodyPr>
+            <a:spAutoFit/>
+          </a:bodyPr>
+          <a:lstStyle/>
+          <a:p>
+            <a:r>
+              <a:rPr lang="en-US" dirty="0" err="1">
+                <a:latin typeface="CMTT12"/>
+              </a:rPr>
+              <a:t>data_equipo</a:t>
+            </a:r>
+            <a:r>
+              <a:rPr lang="en-US" dirty="0">
+                <a:latin typeface="CMTT12"/>
+              </a:rPr>
+              <a:t>_##</a:t>
+            </a:r>
+            <a:r>
+              <a:rPr lang="en-US" dirty="0">
+                <a:latin typeface="CMR12"/>
+              </a:rPr>
+              <a:t>: Show how the data was built and cleaned, highlight key</a:t>
+            </a:r>
+          </a:p>
+          <a:p>
+            <a:r>
+              <a:rPr lang="en-US" dirty="0">
+                <a:latin typeface="CMR12"/>
+              </a:rPr>
+              <a:t>variables and descriptive statistics, and explain how these choices supported</a:t>
+            </a:r>
+          </a:p>
+          <a:p>
+            <a:r>
+              <a:rPr lang="es-CO" dirty="0" err="1">
+                <a:latin typeface="CMR12"/>
+              </a:rPr>
+              <a:t>the</a:t>
+            </a:r>
+            <a:r>
+              <a:rPr lang="es-CO" dirty="0">
+                <a:latin typeface="CMR12"/>
+              </a:rPr>
+              <a:t> </a:t>
+            </a:r>
+            <a:r>
+              <a:rPr lang="es-CO" dirty="0" err="1">
+                <a:latin typeface="CMR12"/>
+              </a:rPr>
+              <a:t>best</a:t>
+            </a:r>
+            <a:r>
+              <a:rPr lang="es-CO" dirty="0">
+                <a:latin typeface="CMR12"/>
+              </a:rPr>
+              <a:t> </a:t>
+            </a:r>
+            <a:r>
+              <a:rPr lang="es-CO" dirty="0" err="1">
+                <a:latin typeface="CMR12"/>
+              </a:rPr>
+              <a:t>model</a:t>
+            </a:r>
+            <a:r>
+              <a:rPr lang="es-CO" dirty="0">
+                <a:latin typeface="CMR12"/>
+              </a:rPr>
+              <a:t>.</a:t>
+            </a:r>
+            <a:endParaRPr lang="es-CO" dirty="0"/>
           </a:p>
         </p:txBody>
       </p:sp>

--- a/Presentaciones/data_equipo_08.pptx
+++ b/Presentaciones/data_equipo_08.pptx
@@ -5,11 +5,16 @@
     <p:sldMasterId id="2147483648" r:id="rId1"/>
   </p:sldMasterIdLst>
   <p:notesMasterIdLst>
-    <p:notesMasterId r:id="rId4"/>
+    <p:notesMasterId r:id="rId9"/>
   </p:notesMasterIdLst>
   <p:sldIdLst>
     <p:sldId id="264" r:id="rId2"/>
-    <p:sldId id="265" r:id="rId3"/>
+    <p:sldId id="271" r:id="rId3"/>
+    <p:sldId id="265" r:id="rId4"/>
+    <p:sldId id="266" r:id="rId5"/>
+    <p:sldId id="270" r:id="rId6"/>
+    <p:sldId id="268" r:id="rId7"/>
+    <p:sldId id="269" r:id="rId8"/>
   </p:sldIdLst>
   <p:sldSz cx="9144000" cy="6858000" type="screen4x3"/>
   <p:notesSz cx="6858000" cy="9144000"/>
@@ -281,7 +286,7 @@
               <a:pPr>
                 <a:defRPr/>
               </a:pPr>
-              <a:t>18/10/2025</a:t>
+              <a:t>19/10/2025</a:t>
             </a:fld>
             <a:endParaRPr lang="es-CO"/>
           </a:p>
@@ -887,6 +892,91 @@
     <p:extLst>
       <p:ext uri="{BB962C8B-B14F-4D97-AF65-F5344CB8AC3E}">
         <p14:creationId xmlns:p14="http://schemas.microsoft.com/office/powerpoint/2010/main" val="4170327203"/>
+      </p:ext>
+    </p:extLst>
+  </p:cSld>
+  <p:clrMapOvr>
+    <a:masterClrMapping/>
+  </p:clrMapOvr>
+</p:notes>
+</file>
+
+<file path=ppt/notesSlides/notesSlide2.xml><?xml version="1.0" encoding="utf-8"?>
+<p:notes xmlns:a="http://schemas.openxmlformats.org/drawingml/2006/main" xmlns:r="http://schemas.openxmlformats.org/officeDocument/2006/relationships" xmlns:p="http://schemas.openxmlformats.org/presentationml/2006/main">
+  <p:cSld>
+    <p:spTree>
+      <p:nvGrpSpPr>
+        <p:cNvPr id="1" name=""/>
+        <p:cNvGrpSpPr/>
+        <p:nvPr/>
+      </p:nvGrpSpPr>
+      <p:grpSpPr>
+        <a:xfrm>
+          <a:off x="0" y="0"/>
+          <a:ext cx="0" cy="0"/>
+          <a:chOff x="0" y="0"/>
+          <a:chExt cx="0" cy="0"/>
+        </a:xfrm>
+      </p:grpSpPr>
+      <p:sp>
+        <p:nvSpPr>
+          <p:cNvPr id="2" name="Marcador de imagen de diapositiva 1"/>
+          <p:cNvSpPr>
+            <a:spLocks noGrp="1" noRot="1" noChangeAspect="1"/>
+          </p:cNvSpPr>
+          <p:nvPr>
+            <p:ph type="sldImg"/>
+          </p:nvPr>
+        </p:nvSpPr>
+        <p:spPr/>
+      </p:sp>
+      <p:sp>
+        <p:nvSpPr>
+          <p:cNvPr id="3" name="Marcador de notas 2"/>
+          <p:cNvSpPr>
+            <a:spLocks noGrp="1"/>
+          </p:cNvSpPr>
+          <p:nvPr>
+            <p:ph type="body" idx="1"/>
+          </p:nvPr>
+        </p:nvSpPr>
+        <p:spPr/>
+        <p:txBody>
+          <a:bodyPr/>
+          <a:lstStyle/>
+          <a:p>
+            <a:endParaRPr lang="es-CO" dirty="0"/>
+          </a:p>
+        </p:txBody>
+      </p:sp>
+      <p:sp>
+        <p:nvSpPr>
+          <p:cNvPr id="4" name="Marcador de número de diapositiva 3"/>
+          <p:cNvSpPr>
+            <a:spLocks noGrp="1"/>
+          </p:cNvSpPr>
+          <p:nvPr>
+            <p:ph type="sldNum" sz="quarter" idx="10"/>
+          </p:nvPr>
+        </p:nvSpPr>
+        <p:spPr/>
+        <p:txBody>
+          <a:bodyPr/>
+          <a:lstStyle/>
+          <a:p>
+            <a:fld id="{005A61EF-A413-4572-B9C0-15D2EEC59714}" type="slidenum">
+              <a:rPr lang="es-CO" altLang="es-CO" smtClean="0"/>
+              <a:pPr/>
+              <a:t>6</a:t>
+            </a:fld>
+            <a:endParaRPr lang="es-CO" altLang="es-CO"/>
+          </a:p>
+        </p:txBody>
+      </p:sp>
+    </p:spTree>
+    <p:extLst>
+      <p:ext uri="{BB962C8B-B14F-4D97-AF65-F5344CB8AC3E}">
+        <p14:creationId xmlns:p14="http://schemas.microsoft.com/office/powerpoint/2010/main" val="2428630986"/>
       </p:ext>
     </p:extLst>
   </p:cSld>
@@ -3565,15 +3655,7 @@
             </a:pPr>
             <a:r>
               <a:rPr lang="es-CO" b="1" dirty="0" smtClean="0"/>
-              <a:t>Limpieza de datos, </a:t>
-            </a:r>
-            <a:r>
-              <a:rPr lang="es-CO" b="1" dirty="0" smtClean="0"/>
-              <a:t>construcción y transformación </a:t>
-            </a:r>
-            <a:r>
-              <a:rPr lang="es-CO" b="1" dirty="0" smtClean="0"/>
-              <a:t>de variables, definición de bases de datos finales.</a:t>
+              <a:t>Limpieza de datos, construcción y transformación de variables, definición de bases de datos finales.</a:t>
             </a:r>
             <a:endParaRPr lang="es-CO" b="1" dirty="0"/>
           </a:p>
@@ -3618,7 +3700,7 @@
       </p:grpSpPr>
       <p:sp>
         <p:nvSpPr>
-          <p:cNvPr id="5122" name="Título 1"/>
+          <p:cNvPr id="2" name="Título 1"/>
           <p:cNvSpPr>
             <a:spLocks noGrp="1"/>
           </p:cNvSpPr>
@@ -3626,133 +3708,1513 @@
             <p:ph type="title"/>
           </p:nvPr>
         </p:nvSpPr>
+        <p:spPr/>
+        <p:txBody>
+          <a:bodyPr/>
+          <a:lstStyle/>
+          <a:p>
+            <a:r>
+              <a:rPr lang="es-CO" dirty="0" smtClean="0"/>
+              <a:t>Mejor Modelo de Predicción</a:t>
+            </a:r>
+            <a:endParaRPr lang="es-CO" dirty="0"/>
+          </a:p>
+        </p:txBody>
+      </p:sp>
+      <p:sp>
+        <p:nvSpPr>
+          <p:cNvPr id="3" name="Marcador de contenido 2"/>
+          <p:cNvSpPr>
+            <a:spLocks noGrp="1"/>
+          </p:cNvSpPr>
+          <p:nvPr>
+            <p:ph idx="1"/>
+          </p:nvPr>
+        </p:nvSpPr>
+        <p:spPr/>
+        <p:txBody>
+          <a:bodyPr/>
+          <a:lstStyle/>
+          <a:p>
+            <a:r>
+              <a:rPr lang="es-CO" dirty="0" smtClean="0"/>
+              <a:t>Especificación</a:t>
+            </a:r>
+          </a:p>
+          <a:p>
+            <a:r>
+              <a:rPr lang="es-CO" dirty="0" err="1" smtClean="0"/>
+              <a:t>Kaggle</a:t>
+            </a:r>
+            <a:r>
+              <a:rPr lang="es-CO" dirty="0" smtClean="0"/>
+              <a:t> Score</a:t>
+            </a:r>
+            <a:endParaRPr lang="es-CO" dirty="0"/>
+          </a:p>
+        </p:txBody>
+      </p:sp>
+    </p:spTree>
+    <p:extLst>
+      <p:ext uri="{BB962C8B-B14F-4D97-AF65-F5344CB8AC3E}">
+        <p14:creationId xmlns:p14="http://schemas.microsoft.com/office/powerpoint/2010/main" val="2214650793"/>
+      </p:ext>
+    </p:extLst>
+  </p:cSld>
+  <p:clrMapOvr>
+    <a:masterClrMapping/>
+  </p:clrMapOvr>
+  <p:timing>
+    <p:tnLst>
+      <p:par>
+        <p:cTn id="1" dur="indefinite" restart="never" nodeType="tmRoot"/>
+      </p:par>
+    </p:tnLst>
+  </p:timing>
+</p:sld>
+</file>
+
+<file path=ppt/slides/slide3.xml><?xml version="1.0" encoding="utf-8"?>
+<p:sld xmlns:a="http://schemas.openxmlformats.org/drawingml/2006/main" xmlns:r="http://schemas.openxmlformats.org/officeDocument/2006/relationships" xmlns:p="http://schemas.openxmlformats.org/presentationml/2006/main">
+  <p:cSld>
+    <p:spTree>
+      <p:nvGrpSpPr>
+        <p:cNvPr id="1" name=""/>
+        <p:cNvGrpSpPr/>
+        <p:nvPr/>
+      </p:nvGrpSpPr>
+      <p:grpSpPr>
+        <a:xfrm>
+          <a:off x="0" y="0"/>
+          <a:ext cx="0" cy="0"/>
+          <a:chOff x="0" y="0"/>
+          <a:chExt cx="0" cy="0"/>
+        </a:xfrm>
+      </p:grpSpPr>
+      <p:sp>
+        <p:nvSpPr>
+          <p:cNvPr id="4" name="Título 3"/>
+          <p:cNvSpPr>
+            <a:spLocks noGrp="1"/>
+          </p:cNvSpPr>
+          <p:nvPr>
+            <p:ph type="title"/>
+          </p:nvPr>
+        </p:nvSpPr>
         <p:spPr>
           <a:xfrm>
-            <a:off x="1042988" y="981075"/>
-            <a:ext cx="8229600" cy="500063"/>
+            <a:off x="723801" y="965325"/>
+            <a:ext cx="8096671" cy="500062"/>
           </a:xfrm>
         </p:spPr>
         <p:txBody>
           <a:bodyPr/>
           <a:lstStyle/>
           <a:p>
-            <a:pPr algn="ctr"/>
-            <a:endParaRPr lang="es-CO" altLang="es-CO" dirty="0" smtClean="0"/>
+            <a:r>
+              <a:rPr lang="es-CO" sz="2000" dirty="0" smtClean="0"/>
+              <a:t>BASES DE DATOS INICIALES Y EXPLORACIÓN DE VARIABLES</a:t>
+            </a:r>
+            <a:endParaRPr lang="es-CO" sz="2000" dirty="0"/>
           </a:p>
         </p:txBody>
       </p:sp>
-      <p:sp>
-        <p:nvSpPr>
-          <p:cNvPr id="2" name="Marcador de contenido 1"/>
-          <p:cNvSpPr>
-            <a:spLocks noGrp="1"/>
-          </p:cNvSpPr>
+      <p:pic>
+        <p:nvPicPr>
+          <p:cNvPr id="13" name="Marcador de contenido 12"/>
+          <p:cNvPicPr>
+            <a:picLocks noGrp="1" noChangeAspect="1"/>
+          </p:cNvPicPr>
           <p:nvPr>
             <p:ph idx="1"/>
           </p:nvPr>
-        </p:nvSpPr>
-        <p:spPr/>
-        <p:txBody>
-          <a:bodyPr/>
-          <a:lstStyle/>
-          <a:p>
-            <a:endParaRPr lang="es-CO"/>
-          </a:p>
-        </p:txBody>
-      </p:sp>
-      <p:sp>
-        <p:nvSpPr>
-          <p:cNvPr id="3" name="Rectángulo 2"/>
+        </p:nvPicPr>
+        <p:blipFill>
+          <a:blip r:embed="rId2">
+            <a:extLst>
+              <a:ext uri="{28A0092B-C50C-407E-A947-70E740481C1C}">
+                <a14:useLocalDpi xmlns:a14="http://schemas.microsoft.com/office/drawing/2010/main" val="0"/>
+              </a:ext>
+            </a:extLst>
+          </a:blip>
+          <a:stretch>
+            <a:fillRect/>
+          </a:stretch>
+        </p:blipFill>
+        <p:spPr>
+          <a:xfrm>
+            <a:off x="723801" y="2251369"/>
+            <a:ext cx="7858125" cy="1802946"/>
+          </a:xfrm>
+        </p:spPr>
+      </p:pic>
+      <p:sp>
+        <p:nvSpPr>
+          <p:cNvPr id="15" name="Rectángulo 14"/>
           <p:cNvSpPr/>
           <p:nvPr/>
         </p:nvSpPr>
         <p:spPr>
           <a:xfrm>
-            <a:off x="4732527" y="1489061"/>
-            <a:ext cx="4572000" cy="1477328"/>
+            <a:off x="663015" y="1556792"/>
+            <a:ext cx="8620959" cy="923330"/>
           </a:xfrm>
           <a:prstGeom prst="rect">
             <a:avLst/>
           </a:prstGeom>
         </p:spPr>
         <p:txBody>
-          <a:bodyPr>
+          <a:bodyPr wrap="square">
             <a:spAutoFit/>
           </a:bodyPr>
           <a:lstStyle/>
           <a:p>
             <a:r>
-              <a:rPr lang="en-US" dirty="0" err="1">
-                <a:latin typeface="CMTT12"/>
-              </a:rPr>
-              <a:t>data_equipo</a:t>
-            </a:r>
-            <a:r>
-              <a:rPr lang="en-US" dirty="0">
-                <a:latin typeface="CMTT12"/>
-              </a:rPr>
-              <a:t>_##</a:t>
-            </a:r>
-            <a:r>
-              <a:rPr lang="en-US" dirty="0">
-                <a:latin typeface="CMR12"/>
-              </a:rPr>
-              <a:t>: Show how the data was built and cleaned, highlight key</a:t>
-            </a:r>
-          </a:p>
-          <a:p>
-            <a:r>
-              <a:rPr lang="en-US" dirty="0">
-                <a:latin typeface="CMR12"/>
-              </a:rPr>
-              <a:t>variables and descriptive statistics, and explain how these choices supported</a:t>
-            </a:r>
-          </a:p>
-          <a:p>
-            <a:r>
-              <a:rPr lang="es-CO" dirty="0" err="1">
-                <a:latin typeface="CMR12"/>
-              </a:rPr>
-              <a:t>the</a:t>
-            </a:r>
-            <a:r>
-              <a:rPr lang="es-CO" dirty="0">
-                <a:latin typeface="CMR12"/>
-              </a:rPr>
-              <a:t> </a:t>
-            </a:r>
-            <a:r>
-              <a:rPr lang="es-CO" dirty="0" err="1">
-                <a:latin typeface="CMR12"/>
-              </a:rPr>
-              <a:t>best</a:t>
-            </a:r>
-            <a:r>
-              <a:rPr lang="es-CO" dirty="0">
-                <a:latin typeface="CMR12"/>
-              </a:rPr>
-              <a:t> </a:t>
-            </a:r>
-            <a:r>
-              <a:rPr lang="es-CO" dirty="0" err="1">
-                <a:latin typeface="CMR12"/>
-              </a:rPr>
-              <a:t>model</a:t>
-            </a:r>
-            <a:r>
-              <a:rPr lang="es-CO" dirty="0">
-                <a:latin typeface="CMR12"/>
-              </a:rPr>
-              <a:t>.</a:t>
-            </a:r>
+              <a:rPr lang="es-CO" dirty="0" smtClean="0"/>
+              <a:t>Las bases de datos iniciales se obtuvieron de la competencia de </a:t>
+            </a:r>
+            <a:r>
+              <a:rPr lang="es-CO" dirty="0" err="1" smtClean="0"/>
+              <a:t>Kaggle</a:t>
+            </a:r>
+            <a:endParaRPr lang="es-CO" dirty="0" smtClean="0"/>
+          </a:p>
+          <a:p>
+            <a:r>
+              <a:rPr lang="es-CO" b="1" dirty="0"/>
+              <a:t>uniandes-bdml-2025_20-ps2</a:t>
+            </a:r>
+          </a:p>
+          <a:p>
             <a:endParaRPr lang="es-CO" dirty="0"/>
           </a:p>
         </p:txBody>
       </p:sp>
+      <p:sp>
+        <p:nvSpPr>
+          <p:cNvPr id="16" name="Rectángulo 15"/>
+          <p:cNvSpPr/>
+          <p:nvPr/>
+        </p:nvSpPr>
+        <p:spPr>
+          <a:xfrm>
+            <a:off x="707599" y="4151826"/>
+            <a:ext cx="8620959" cy="369332"/>
+          </a:xfrm>
+          <a:prstGeom prst="rect">
+            <a:avLst/>
+          </a:prstGeom>
+        </p:spPr>
+        <p:txBody>
+          <a:bodyPr wrap="square">
+            <a:spAutoFit/>
+          </a:bodyPr>
+          <a:lstStyle/>
+          <a:p>
+            <a:r>
+              <a:rPr lang="es-CO" dirty="0" smtClean="0"/>
+              <a:t>Variables en común en bases de entrenamiento y de prueba en el nivel Hogares:</a:t>
+            </a:r>
+            <a:endParaRPr lang="es-CO" dirty="0"/>
+          </a:p>
+        </p:txBody>
+      </p:sp>
+      <p:pic>
+        <p:nvPicPr>
+          <p:cNvPr id="14" name="Imagen 13"/>
+          <p:cNvPicPr>
+            <a:picLocks noChangeAspect="1"/>
+          </p:cNvPicPr>
+          <p:nvPr/>
+        </p:nvPicPr>
+        <p:blipFill>
+          <a:blip r:embed="rId3">
+            <a:extLst>
+              <a:ext uri="{28A0092B-C50C-407E-A947-70E740481C1C}">
+                <a14:useLocalDpi xmlns:a14="http://schemas.microsoft.com/office/drawing/2010/main" val="0"/>
+              </a:ext>
+            </a:extLst>
+          </a:blip>
+          <a:stretch>
+            <a:fillRect/>
+          </a:stretch>
+        </p:blipFill>
+        <p:spPr>
+          <a:xfrm>
+            <a:off x="723801" y="4549827"/>
+            <a:ext cx="7858125" cy="2175176"/>
+          </a:xfrm>
+          <a:prstGeom prst="rect">
+            <a:avLst/>
+          </a:prstGeom>
+        </p:spPr>
+      </p:pic>
     </p:spTree>
     <p:extLst>
       <p:ext uri="{BB962C8B-B14F-4D97-AF65-F5344CB8AC3E}">
         <p14:creationId xmlns:p14="http://schemas.microsoft.com/office/powerpoint/2010/main" val="3163502875"/>
+      </p:ext>
+    </p:extLst>
+  </p:cSld>
+  <p:clrMapOvr>
+    <a:masterClrMapping/>
+  </p:clrMapOvr>
+  <p:timing>
+    <p:tnLst>
+      <p:par>
+        <p:cTn id="1" dur="indefinite" restart="never" nodeType="tmRoot"/>
+      </p:par>
+    </p:tnLst>
+  </p:timing>
+</p:sld>
+</file>
+
+<file path=ppt/slides/slide4.xml><?xml version="1.0" encoding="utf-8"?>
+<p:sld xmlns:a="http://schemas.openxmlformats.org/drawingml/2006/main" xmlns:r="http://schemas.openxmlformats.org/officeDocument/2006/relationships" xmlns:p="http://schemas.openxmlformats.org/presentationml/2006/main">
+  <p:cSld>
+    <p:spTree>
+      <p:nvGrpSpPr>
+        <p:cNvPr id="1" name=""/>
+        <p:cNvGrpSpPr/>
+        <p:nvPr/>
+      </p:nvGrpSpPr>
+      <p:grpSpPr>
+        <a:xfrm>
+          <a:off x="0" y="0"/>
+          <a:ext cx="0" cy="0"/>
+          <a:chOff x="0" y="0"/>
+          <a:chExt cx="0" cy="0"/>
+        </a:xfrm>
+      </p:grpSpPr>
+      <p:sp>
+        <p:nvSpPr>
+          <p:cNvPr id="4" name="Título 3"/>
+          <p:cNvSpPr>
+            <a:spLocks noGrp="1"/>
+          </p:cNvSpPr>
+          <p:nvPr>
+            <p:ph type="title"/>
+          </p:nvPr>
+        </p:nvSpPr>
+        <p:spPr>
+          <a:xfrm>
+            <a:off x="505619" y="869724"/>
+            <a:ext cx="8229600" cy="500062"/>
+          </a:xfrm>
+        </p:spPr>
+        <p:txBody>
+          <a:bodyPr/>
+          <a:lstStyle/>
+          <a:p>
+            <a:r>
+              <a:rPr lang="es-CO" dirty="0">
+                <a:latin typeface="CMR12"/>
+              </a:rPr>
+              <a:t>Exploración de </a:t>
+            </a:r>
+            <a:r>
+              <a:rPr lang="es-CO" dirty="0" smtClean="0">
+                <a:latin typeface="CMR12"/>
+              </a:rPr>
+              <a:t>variables y datos faltantes en Hogares</a:t>
+            </a:r>
+            <a:endParaRPr lang="es-CO" dirty="0"/>
+          </a:p>
+        </p:txBody>
+      </p:sp>
+      <p:pic>
+        <p:nvPicPr>
+          <p:cNvPr id="8" name="Imagen 7"/>
+          <p:cNvPicPr>
+            <a:picLocks noChangeAspect="1"/>
+          </p:cNvPicPr>
+          <p:nvPr/>
+        </p:nvPicPr>
+        <p:blipFill>
+          <a:blip r:embed="rId2">
+            <a:extLst>
+              <a:ext uri="{28A0092B-C50C-407E-A947-70E740481C1C}">
+                <a14:useLocalDpi xmlns:a14="http://schemas.microsoft.com/office/drawing/2010/main" val="0"/>
+              </a:ext>
+            </a:extLst>
+          </a:blip>
+          <a:stretch>
+            <a:fillRect/>
+          </a:stretch>
+        </p:blipFill>
+        <p:spPr>
+          <a:xfrm>
+            <a:off x="107504" y="1517044"/>
+            <a:ext cx="4176464" cy="5177502"/>
+          </a:xfrm>
+          <a:prstGeom prst="rect">
+            <a:avLst/>
+          </a:prstGeom>
+        </p:spPr>
+      </p:pic>
+      <p:pic>
+        <p:nvPicPr>
+          <p:cNvPr id="10" name="Marcador de contenido 9"/>
+          <p:cNvPicPr>
+            <a:picLocks noGrp="1" noChangeAspect="1"/>
+          </p:cNvPicPr>
+          <p:nvPr>
+            <p:ph idx="1"/>
+          </p:nvPr>
+        </p:nvPicPr>
+        <p:blipFill>
+          <a:blip r:embed="rId3" cstate="hqprint">
+            <a:extLst>
+              <a:ext uri="{28A0092B-C50C-407E-A947-70E740481C1C}">
+                <a14:useLocalDpi xmlns:a14="http://schemas.microsoft.com/office/drawing/2010/main" val="0"/>
+              </a:ext>
+            </a:extLst>
+          </a:blip>
+          <a:stretch>
+            <a:fillRect/>
+          </a:stretch>
+        </p:blipFill>
+        <p:spPr>
+          <a:xfrm>
+            <a:off x="4283968" y="1519027"/>
+            <a:ext cx="4860032" cy="3663023"/>
+          </a:xfrm>
+        </p:spPr>
+      </p:pic>
+      <p:sp>
+        <p:nvSpPr>
+          <p:cNvPr id="11" name="CuadroTexto 10"/>
+          <p:cNvSpPr txBox="1"/>
+          <p:nvPr/>
+        </p:nvSpPr>
+        <p:spPr>
+          <a:xfrm>
+            <a:off x="4427984" y="5476567"/>
+            <a:ext cx="4440907" cy="1015663"/>
+          </a:xfrm>
+          <a:prstGeom prst="rect">
+            <a:avLst/>
+          </a:prstGeom>
+          <a:noFill/>
+        </p:spPr>
+        <p:txBody>
+          <a:bodyPr wrap="square" rtlCol="0">
+            <a:spAutoFit/>
+          </a:bodyPr>
+          <a:lstStyle/>
+          <a:p>
+            <a:pPr algn="just"/>
+            <a:r>
+              <a:rPr lang="es-CO" sz="1200" dirty="0" smtClean="0"/>
+              <a:t>Eliminación de variables con datos faltantes &gt;5% y</a:t>
+            </a:r>
+            <a:r>
+              <a:rPr lang="es-MX" sz="1200" dirty="0" smtClean="0"/>
+              <a:t> </a:t>
+            </a:r>
+            <a:r>
+              <a:rPr lang="es-MX" sz="1200" dirty="0"/>
+              <a:t>aquellas que no aportan valor a la </a:t>
+            </a:r>
+            <a:r>
+              <a:rPr lang="es-MX" sz="1200" dirty="0" smtClean="0"/>
+              <a:t>predicción de la condición </a:t>
+            </a:r>
+            <a:r>
+              <a:rPr lang="es-MX" sz="1200" dirty="0"/>
+              <a:t>de pobreza, como los factores de </a:t>
+            </a:r>
+            <a:r>
+              <a:rPr lang="es-MX" sz="1200" dirty="0" smtClean="0"/>
+              <a:t>expansión</a:t>
+            </a:r>
+            <a:r>
+              <a:rPr lang="es-MX" sz="1200" dirty="0"/>
+              <a:t>, la </a:t>
+            </a:r>
+            <a:r>
+              <a:rPr lang="es-MX" sz="1200" dirty="0" smtClean="0"/>
+              <a:t>línea </a:t>
+            </a:r>
+            <a:r>
+              <a:rPr lang="es-MX" sz="1200" dirty="0"/>
+              <a:t>de pobreza (utilizada para construir </a:t>
+            </a:r>
+            <a:r>
+              <a:rPr lang="es-MX" sz="1200" dirty="0" smtClean="0"/>
+              <a:t>la variable dicótoma </a:t>
+            </a:r>
+            <a:r>
+              <a:rPr lang="es-MX" sz="1200" dirty="0"/>
+              <a:t>Pobre</a:t>
+            </a:r>
+            <a:r>
+              <a:rPr lang="es-MX" sz="1200" dirty="0" smtClean="0"/>
+              <a:t>), </a:t>
+            </a:r>
+            <a:r>
+              <a:rPr lang="es-MX" sz="1200" dirty="0"/>
+              <a:t>la </a:t>
+            </a:r>
+            <a:r>
+              <a:rPr lang="es-MX" sz="1200" dirty="0" smtClean="0"/>
+              <a:t>línea </a:t>
+            </a:r>
+            <a:r>
+              <a:rPr lang="es-MX" sz="1200" dirty="0"/>
+              <a:t>de </a:t>
+            </a:r>
+            <a:r>
+              <a:rPr lang="es-MX" sz="1200" dirty="0" smtClean="0"/>
+              <a:t>indigencia y número de personas en la unidad de gasto.</a:t>
+            </a:r>
+            <a:endParaRPr lang="es-CO" sz="1200" dirty="0"/>
+          </a:p>
+        </p:txBody>
+      </p:sp>
+    </p:spTree>
+    <p:extLst>
+      <p:ext uri="{BB962C8B-B14F-4D97-AF65-F5344CB8AC3E}">
+        <p14:creationId xmlns:p14="http://schemas.microsoft.com/office/powerpoint/2010/main" val="2091562631"/>
+      </p:ext>
+    </p:extLst>
+  </p:cSld>
+  <p:clrMapOvr>
+    <a:masterClrMapping/>
+  </p:clrMapOvr>
+  <p:timing>
+    <p:tnLst>
+      <p:par>
+        <p:cTn id="1" dur="indefinite" restart="never" nodeType="tmRoot"/>
+      </p:par>
+    </p:tnLst>
+  </p:timing>
+</p:sld>
+</file>
+
+<file path=ppt/slides/slide5.xml><?xml version="1.0" encoding="utf-8"?>
+<p:sld xmlns:a="http://schemas.openxmlformats.org/drawingml/2006/main" xmlns:r="http://schemas.openxmlformats.org/officeDocument/2006/relationships" xmlns:p="http://schemas.openxmlformats.org/presentationml/2006/main">
+  <p:cSld>
+    <p:spTree>
+      <p:nvGrpSpPr>
+        <p:cNvPr id="1" name=""/>
+        <p:cNvGrpSpPr/>
+        <p:nvPr/>
+      </p:nvGrpSpPr>
+      <p:grpSpPr>
+        <a:xfrm>
+          <a:off x="0" y="0"/>
+          <a:ext cx="0" cy="0"/>
+          <a:chOff x="0" y="0"/>
+          <a:chExt cx="0" cy="0"/>
+        </a:xfrm>
+      </p:grpSpPr>
+      <p:sp>
+        <p:nvSpPr>
+          <p:cNvPr id="2" name="Título 1"/>
+          <p:cNvSpPr>
+            <a:spLocks noGrp="1"/>
+          </p:cNvSpPr>
+          <p:nvPr>
+            <p:ph type="title"/>
+          </p:nvPr>
+        </p:nvSpPr>
+        <p:spPr>
+          <a:xfrm>
+            <a:off x="470848" y="908720"/>
+            <a:ext cx="8229600" cy="500062"/>
+          </a:xfrm>
+        </p:spPr>
+        <p:txBody>
+          <a:bodyPr/>
+          <a:lstStyle/>
+          <a:p>
+            <a:r>
+              <a:rPr lang="es-CO" dirty="0">
+                <a:latin typeface="CMR12"/>
+              </a:rPr>
+              <a:t>Exploración de variables y datos faltantes en Personas</a:t>
+            </a:r>
+            <a:endParaRPr lang="es-CO" dirty="0"/>
+          </a:p>
+        </p:txBody>
+      </p:sp>
+      <p:pic>
+        <p:nvPicPr>
+          <p:cNvPr id="5" name="Marcador de contenido 4"/>
+          <p:cNvPicPr>
+            <a:picLocks noGrp="1" noChangeAspect="1"/>
+          </p:cNvPicPr>
+          <p:nvPr>
+            <p:ph sz="half" idx="1"/>
+          </p:nvPr>
+        </p:nvPicPr>
+        <p:blipFill>
+          <a:blip r:embed="rId2">
+            <a:extLst>
+              <a:ext uri="{28A0092B-C50C-407E-A947-70E740481C1C}">
+                <a14:useLocalDpi xmlns:a14="http://schemas.microsoft.com/office/drawing/2010/main" val="0"/>
+              </a:ext>
+            </a:extLst>
+          </a:blip>
+          <a:stretch>
+            <a:fillRect/>
+          </a:stretch>
+        </p:blipFill>
+        <p:spPr>
+          <a:xfrm>
+            <a:off x="755576" y="1772816"/>
+            <a:ext cx="3312368" cy="2233265"/>
+          </a:xfrm>
+        </p:spPr>
+      </p:pic>
+      <p:pic>
+        <p:nvPicPr>
+          <p:cNvPr id="6" name="Marcador de contenido 5"/>
+          <p:cNvPicPr>
+            <a:picLocks noGrp="1" noChangeAspect="1"/>
+          </p:cNvPicPr>
+          <p:nvPr>
+            <p:ph sz="half" idx="2"/>
+          </p:nvPr>
+        </p:nvPicPr>
+        <p:blipFill>
+          <a:blip r:embed="rId3" cstate="hqprint">
+            <a:extLst>
+              <a:ext uri="{28A0092B-C50C-407E-A947-70E740481C1C}">
+                <a14:useLocalDpi xmlns:a14="http://schemas.microsoft.com/office/drawing/2010/main" val="0"/>
+              </a:ext>
+            </a:extLst>
+          </a:blip>
+          <a:stretch>
+            <a:fillRect/>
+          </a:stretch>
+        </p:blipFill>
+        <p:spPr>
+          <a:xfrm>
+            <a:off x="4211960" y="1772816"/>
+            <a:ext cx="4680520" cy="4896544"/>
+          </a:xfrm>
+        </p:spPr>
+      </p:pic>
+      <p:sp>
+        <p:nvSpPr>
+          <p:cNvPr id="7" name="CuadroTexto 6"/>
+          <p:cNvSpPr txBox="1"/>
+          <p:nvPr/>
+        </p:nvSpPr>
+        <p:spPr>
+          <a:xfrm>
+            <a:off x="751164" y="4370115"/>
+            <a:ext cx="3302758" cy="2246769"/>
+          </a:xfrm>
+          <a:prstGeom prst="rect">
+            <a:avLst/>
+          </a:prstGeom>
+          <a:noFill/>
+        </p:spPr>
+        <p:txBody>
+          <a:bodyPr wrap="square" rtlCol="0">
+            <a:spAutoFit/>
+          </a:bodyPr>
+          <a:lstStyle/>
+          <a:p>
+            <a:pPr algn="just"/>
+            <a:r>
+              <a:rPr lang="es-CO" sz="1400" dirty="0"/>
+              <a:t>S</a:t>
+            </a:r>
+            <a:r>
+              <a:rPr lang="es-CO" sz="1400" dirty="0" smtClean="0"/>
+              <a:t>e utilizó </a:t>
+            </a:r>
+            <a:r>
+              <a:rPr lang="es-CO" sz="1400" dirty="0"/>
+              <a:t>el </a:t>
+            </a:r>
+            <a:r>
+              <a:rPr lang="es-CO" sz="1400" dirty="0" smtClean="0"/>
+              <a:t>identificador </a:t>
+            </a:r>
+            <a:r>
+              <a:rPr lang="es-MX" sz="1400" dirty="0" smtClean="0"/>
+              <a:t>del </a:t>
+            </a:r>
+            <a:r>
+              <a:rPr lang="es-MX" sz="1400" dirty="0"/>
+              <a:t>hogar para transferir a las bases de </a:t>
+            </a:r>
+            <a:r>
+              <a:rPr lang="es-MX" sz="1400" dirty="0" smtClean="0"/>
+              <a:t>hogares la información </a:t>
+            </a:r>
+            <a:r>
+              <a:rPr lang="es-MX" sz="1400" dirty="0"/>
+              <a:t>relacionada con </a:t>
+            </a:r>
+            <a:r>
+              <a:rPr lang="es-MX" sz="1400" b="1" i="1" dirty="0"/>
+              <a:t>el sexo, la edad, el </a:t>
+            </a:r>
+            <a:r>
+              <a:rPr lang="es-MX" sz="1400" b="1" i="1" dirty="0" smtClean="0"/>
+              <a:t>nivel educativo </a:t>
+            </a:r>
+            <a:r>
+              <a:rPr lang="es-MX" sz="1400" b="1" i="1" dirty="0"/>
+              <a:t>y </a:t>
+            </a:r>
+            <a:r>
+              <a:rPr lang="es-MX" sz="1400" b="1" i="1" dirty="0" smtClean="0"/>
+              <a:t>la actividad </a:t>
+            </a:r>
+            <a:r>
+              <a:rPr lang="es-MX" sz="1400" b="1" i="1" dirty="0"/>
+              <a:t>u </a:t>
+            </a:r>
+            <a:r>
+              <a:rPr lang="es-MX" sz="1400" b="1" i="1" dirty="0" smtClean="0"/>
+              <a:t>ocupación </a:t>
+            </a:r>
+            <a:r>
+              <a:rPr lang="es-MX" sz="1400" b="1" i="1" dirty="0"/>
+              <a:t>del jefe del </a:t>
+            </a:r>
+            <a:r>
+              <a:rPr lang="es-MX" sz="1400" b="1" i="1" dirty="0" smtClean="0"/>
+              <a:t>hogar</a:t>
+            </a:r>
+            <a:r>
+              <a:rPr lang="es-MX" sz="1400" dirty="0" smtClean="0"/>
+              <a:t>. Las demás </a:t>
+            </a:r>
+            <a:r>
+              <a:rPr lang="es-MX" sz="1400" dirty="0"/>
+              <a:t>variables se </a:t>
+            </a:r>
+            <a:r>
+              <a:rPr lang="es-MX" sz="1400" dirty="0" smtClean="0"/>
+              <a:t>consideran irrelevantes para </a:t>
+            </a:r>
+            <a:r>
+              <a:rPr lang="es-MX" sz="1400" dirty="0"/>
+              <a:t>el presente estudio dada la </a:t>
+            </a:r>
+            <a:r>
+              <a:rPr lang="es-MX" sz="1400" dirty="0" smtClean="0"/>
+              <a:t>información </a:t>
+            </a:r>
+            <a:r>
+              <a:rPr lang="es-MX" sz="1400" dirty="0"/>
+              <a:t>que representan y la </a:t>
+            </a:r>
+            <a:r>
+              <a:rPr lang="es-MX" sz="1400" dirty="0" smtClean="0"/>
+              <a:t>cantidad </a:t>
+            </a:r>
+            <a:r>
+              <a:rPr lang="es-MX" sz="1400" dirty="0"/>
+              <a:t>de datos faltantes.</a:t>
+            </a:r>
+            <a:endParaRPr lang="es-CO" sz="1400" dirty="0"/>
+          </a:p>
+        </p:txBody>
+      </p:sp>
+    </p:spTree>
+    <p:extLst>
+      <p:ext uri="{BB962C8B-B14F-4D97-AF65-F5344CB8AC3E}">
+        <p14:creationId xmlns:p14="http://schemas.microsoft.com/office/powerpoint/2010/main" val="4181686931"/>
+      </p:ext>
+    </p:extLst>
+  </p:cSld>
+  <p:clrMapOvr>
+    <a:masterClrMapping/>
+  </p:clrMapOvr>
+  <p:timing>
+    <p:tnLst>
+      <p:par>
+        <p:cTn id="1" dur="indefinite" restart="never" nodeType="tmRoot"/>
+      </p:par>
+    </p:tnLst>
+  </p:timing>
+</p:sld>
+</file>
+
+<file path=ppt/slides/slide6.xml><?xml version="1.0" encoding="utf-8"?>
+<p:sld xmlns:a="http://schemas.openxmlformats.org/drawingml/2006/main" xmlns:r="http://schemas.openxmlformats.org/officeDocument/2006/relationships" xmlns:p="http://schemas.openxmlformats.org/presentationml/2006/main">
+  <p:cSld>
+    <p:spTree>
+      <p:nvGrpSpPr>
+        <p:cNvPr id="1" name=""/>
+        <p:cNvGrpSpPr/>
+        <p:nvPr/>
+      </p:nvGrpSpPr>
+      <p:grpSpPr>
+        <a:xfrm>
+          <a:off x="0" y="0"/>
+          <a:ext cx="0" cy="0"/>
+          <a:chOff x="0" y="0"/>
+          <a:chExt cx="0" cy="0"/>
+        </a:xfrm>
+      </p:grpSpPr>
+      <p:sp>
+        <p:nvSpPr>
+          <p:cNvPr id="2" name="Título 1"/>
+          <p:cNvSpPr>
+            <a:spLocks noGrp="1"/>
+          </p:cNvSpPr>
+          <p:nvPr>
+            <p:ph type="title"/>
+          </p:nvPr>
+        </p:nvSpPr>
+        <p:spPr>
+          <a:xfrm>
+            <a:off x="683568" y="1052736"/>
+            <a:ext cx="8229600" cy="500062"/>
+          </a:xfrm>
+        </p:spPr>
+        <p:txBody>
+          <a:bodyPr/>
+          <a:lstStyle/>
+          <a:p>
+            <a:r>
+              <a:rPr lang="es-CO" dirty="0" smtClean="0"/>
+              <a:t>Bases de datos finales</a:t>
+            </a:r>
+            <a:endParaRPr lang="es-CO" dirty="0"/>
+          </a:p>
+        </p:txBody>
+      </p:sp>
+      <p:pic>
+        <p:nvPicPr>
+          <p:cNvPr id="4" name="Marcador de contenido 3"/>
+          <p:cNvPicPr>
+            <a:picLocks noGrp="1" noChangeAspect="1"/>
+          </p:cNvPicPr>
+          <p:nvPr>
+            <p:ph idx="1"/>
+          </p:nvPr>
+        </p:nvPicPr>
+        <p:blipFill>
+          <a:blip r:embed="rId3" cstate="print">
+            <a:extLst>
+              <a:ext uri="{28A0092B-C50C-407E-A947-70E740481C1C}">
+                <a14:useLocalDpi xmlns:a14="http://schemas.microsoft.com/office/drawing/2010/main" val="0"/>
+              </a:ext>
+            </a:extLst>
+          </a:blip>
+          <a:stretch>
+            <a:fillRect/>
+          </a:stretch>
+        </p:blipFill>
+        <p:spPr>
+          <a:xfrm>
+            <a:off x="570761" y="1547243"/>
+            <a:ext cx="8316924" cy="3748410"/>
+          </a:xfrm>
+        </p:spPr>
+      </p:pic>
+      <p:pic>
+        <p:nvPicPr>
+          <p:cNvPr id="5" name="Imagen 4"/>
+          <p:cNvPicPr>
+            <a:picLocks noChangeAspect="1"/>
+          </p:cNvPicPr>
+          <p:nvPr/>
+        </p:nvPicPr>
+        <p:blipFill>
+          <a:blip r:embed="rId4">
+            <a:extLst>
+              <a:ext uri="{28A0092B-C50C-407E-A947-70E740481C1C}">
+                <a14:useLocalDpi xmlns:a14="http://schemas.microsoft.com/office/drawing/2010/main" val="0"/>
+              </a:ext>
+            </a:extLst>
+          </a:blip>
+          <a:stretch>
+            <a:fillRect/>
+          </a:stretch>
+        </p:blipFill>
+        <p:spPr>
+          <a:xfrm>
+            <a:off x="570761" y="5342866"/>
+            <a:ext cx="5369392" cy="1515012"/>
+          </a:xfrm>
+          <a:prstGeom prst="rect">
+            <a:avLst/>
+          </a:prstGeom>
+        </p:spPr>
+      </p:pic>
+      <p:sp>
+        <p:nvSpPr>
+          <p:cNvPr id="6" name="CuadroTexto 5"/>
+          <p:cNvSpPr txBox="1"/>
+          <p:nvPr/>
+        </p:nvSpPr>
+        <p:spPr>
+          <a:xfrm>
+            <a:off x="6078059" y="5342866"/>
+            <a:ext cx="2809626" cy="1384995"/>
+          </a:xfrm>
+          <a:prstGeom prst="rect">
+            <a:avLst/>
+          </a:prstGeom>
+          <a:noFill/>
+        </p:spPr>
+        <p:txBody>
+          <a:bodyPr wrap="square" rtlCol="0">
+            <a:spAutoFit/>
+          </a:bodyPr>
+          <a:lstStyle/>
+          <a:p>
+            <a:pPr algn="just"/>
+            <a:r>
+              <a:rPr lang="es-CO" sz="1400" dirty="0" smtClean="0"/>
+              <a:t>Imputación por la moda en valores faltantes de Actividad u ocupación y Nivel educativo del jefe del hogar.</a:t>
+            </a:r>
+          </a:p>
+          <a:p>
+            <a:pPr algn="just"/>
+            <a:r>
+              <a:rPr lang="es-CO" sz="1400" dirty="0" smtClean="0"/>
+              <a:t>Variable Pobre únicamente en base de entrenamiento.</a:t>
+            </a:r>
+            <a:endParaRPr lang="es-CO" sz="1400" dirty="0"/>
+          </a:p>
+        </p:txBody>
+      </p:sp>
+    </p:spTree>
+    <p:extLst>
+      <p:ext uri="{BB962C8B-B14F-4D97-AF65-F5344CB8AC3E}">
+        <p14:creationId xmlns:p14="http://schemas.microsoft.com/office/powerpoint/2010/main" val="3405093419"/>
+      </p:ext>
+    </p:extLst>
+  </p:cSld>
+  <p:clrMapOvr>
+    <a:masterClrMapping/>
+  </p:clrMapOvr>
+  <p:timing>
+    <p:tnLst>
+      <p:par>
+        <p:cTn id="1" dur="indefinite" restart="never" nodeType="tmRoot"/>
+      </p:par>
+    </p:tnLst>
+  </p:timing>
+</p:sld>
+</file>
+
+<file path=ppt/slides/slide7.xml><?xml version="1.0" encoding="utf-8"?>
+<p:sld xmlns:a="http://schemas.openxmlformats.org/drawingml/2006/main" xmlns:r="http://schemas.openxmlformats.org/officeDocument/2006/relationships" xmlns:p="http://schemas.openxmlformats.org/presentationml/2006/main">
+  <p:cSld>
+    <p:spTree>
+      <p:nvGrpSpPr>
+        <p:cNvPr id="1" name=""/>
+        <p:cNvGrpSpPr/>
+        <p:nvPr/>
+      </p:nvGrpSpPr>
+      <p:grpSpPr>
+        <a:xfrm>
+          <a:off x="0" y="0"/>
+          <a:ext cx="0" cy="0"/>
+          <a:chOff x="0" y="0"/>
+          <a:chExt cx="0" cy="0"/>
+        </a:xfrm>
+      </p:grpSpPr>
+      <p:sp>
+        <p:nvSpPr>
+          <p:cNvPr id="2" name="Título 1"/>
+          <p:cNvSpPr>
+            <a:spLocks noGrp="1"/>
+          </p:cNvSpPr>
+          <p:nvPr>
+            <p:ph type="title"/>
+          </p:nvPr>
+        </p:nvSpPr>
+        <p:spPr>
+          <a:xfrm>
+            <a:off x="683568" y="1052736"/>
+            <a:ext cx="8229600" cy="500062"/>
+          </a:xfrm>
+        </p:spPr>
+        <p:txBody>
+          <a:bodyPr/>
+          <a:lstStyle/>
+          <a:p>
+            <a:r>
+              <a:rPr lang="es-CO" dirty="0" smtClean="0"/>
+              <a:t>Variable Objetivo: Pobre</a:t>
+            </a:r>
+            <a:endParaRPr lang="es-CO" dirty="0"/>
+          </a:p>
+        </p:txBody>
+      </p:sp>
+      <p:pic>
+        <p:nvPicPr>
+          <p:cNvPr id="4" name="Marcador de contenido 3"/>
+          <p:cNvPicPr>
+            <a:picLocks noGrp="1" noChangeAspect="1"/>
+          </p:cNvPicPr>
+          <p:nvPr>
+            <p:ph idx="1"/>
+          </p:nvPr>
+        </p:nvPicPr>
+        <p:blipFill>
+          <a:blip r:embed="rId2" cstate="print">
+            <a:extLst>
+              <a:ext uri="{28A0092B-C50C-407E-A947-70E740481C1C}">
+                <a14:useLocalDpi xmlns:a14="http://schemas.microsoft.com/office/drawing/2010/main" val="0"/>
+              </a:ext>
+            </a:extLst>
+          </a:blip>
+          <a:stretch>
+            <a:fillRect/>
+          </a:stretch>
+        </p:blipFill>
+        <p:spPr>
+          <a:xfrm>
+            <a:off x="1691680" y="2714625"/>
+            <a:ext cx="5800725" cy="4143375"/>
+          </a:xfrm>
+        </p:spPr>
+      </p:pic>
+      <mc:AlternateContent xmlns:mc="http://schemas.openxmlformats.org/markup-compatibility/2006">
+        <mc:Choice xmlns:a14="http://schemas.microsoft.com/office/drawing/2010/main" Requires="a14">
+          <p:sp>
+            <p:nvSpPr>
+              <p:cNvPr id="5" name="CuadroTexto 4"/>
+              <p:cNvSpPr txBox="1"/>
+              <p:nvPr/>
+            </p:nvSpPr>
+            <p:spPr>
+              <a:xfrm>
+                <a:off x="251520" y="1700808"/>
+                <a:ext cx="8424936" cy="811441"/>
+              </a:xfrm>
+              <a:prstGeom prst="rect">
+                <a:avLst/>
+              </a:prstGeom>
+              <a:noFill/>
+            </p:spPr>
+            <p:txBody>
+              <a:bodyPr wrap="square" rtlCol="0">
+                <a:spAutoFit/>
+              </a:bodyPr>
+              <a:lstStyle/>
+              <a:p>
+                <a14:m>
+                  <m:oMathPara xmlns:m="http://schemas.openxmlformats.org/officeDocument/2006/math">
+                    <m:oMathParaPr>
+                      <m:jc m:val="centerGroup"/>
+                    </m:oMathParaPr>
+                    <m:oMath xmlns:m="http://schemas.openxmlformats.org/officeDocument/2006/math">
+                      <m:r>
+                        <m:rPr>
+                          <m:nor/>
+                        </m:rPr>
+                        <a:rPr lang="es-CO" i="1" smtClean="0">
+                          <a:latin typeface="Cambria Math" panose="02040503050406030204" pitchFamily="18" charset="0"/>
+                        </a:rPr>
+                        <m:t>Pobre</m:t>
+                      </m:r>
+                      <m:r>
+                        <m:rPr>
+                          <m:nor/>
+                        </m:rPr>
+                        <a:rPr lang="es-CO" i="1" smtClean="0">
+                          <a:latin typeface="Cambria Math" panose="02040503050406030204" pitchFamily="18" charset="0"/>
+                        </a:rPr>
+                        <m:t> = </m:t>
+                      </m:r>
+                      <m:r>
+                        <m:rPr>
+                          <m:nor/>
+                        </m:rPr>
+                        <a:rPr lang="es-CO" i="1" smtClean="0">
+                          <a:latin typeface="Cambria Math" panose="02040503050406030204" pitchFamily="18" charset="0"/>
+                        </a:rPr>
+                        <m:t>I</m:t>
+                      </m:r>
+                      <m:r>
+                        <m:rPr>
+                          <m:nor/>
+                        </m:rPr>
+                        <a:rPr lang="es-CO" i="1" smtClean="0">
+                          <a:latin typeface="Cambria Math" panose="02040503050406030204" pitchFamily="18" charset="0"/>
+                        </a:rPr>
+                        <m:t>*(</m:t>
+                      </m:r>
+                      <m:r>
+                        <m:rPr>
+                          <m:nor/>
+                        </m:rPr>
+                        <a:rPr lang="es-CO" i="1" smtClean="0">
+                          <a:latin typeface="Cambria Math" panose="02040503050406030204" pitchFamily="18" charset="0"/>
+                        </a:rPr>
+                        <m:t>Ingreso</m:t>
+                      </m:r>
+                      <m:r>
+                        <m:rPr>
+                          <m:nor/>
+                        </m:rPr>
+                        <a:rPr lang="es-CO" i="1" smtClean="0">
+                          <a:latin typeface="Cambria Math" panose="02040503050406030204" pitchFamily="18" charset="0"/>
+                        </a:rPr>
+                        <m:t> &lt; </m:t>
+                      </m:r>
+                      <m:r>
+                        <m:rPr>
+                          <m:nor/>
+                        </m:rPr>
+                        <a:rPr lang="es-CO" i="1" smtClean="0">
+                          <a:latin typeface="Cambria Math" panose="02040503050406030204" pitchFamily="18" charset="0"/>
+                        </a:rPr>
+                        <m:t>L</m:t>
+                      </m:r>
+                      <m:r>
+                        <m:rPr>
+                          <m:nor/>
+                        </m:rPr>
+                        <a:rPr lang="es-CO" i="1" smtClean="0">
+                          <a:latin typeface="Cambria Math" panose="02040503050406030204" pitchFamily="18" charset="0"/>
+                        </a:rPr>
+                        <m:t>í</m:t>
+                      </m:r>
+                      <m:r>
+                        <m:rPr>
+                          <m:nor/>
+                        </m:rPr>
+                        <a:rPr lang="es-CO" i="1" smtClean="0">
+                          <a:latin typeface="Cambria Math" panose="02040503050406030204" pitchFamily="18" charset="0"/>
+                        </a:rPr>
+                        <m:t>nea</m:t>
+                      </m:r>
+                      <m:r>
+                        <m:rPr>
+                          <m:nor/>
+                        </m:rPr>
+                        <a:rPr lang="es-CO" i="1" smtClean="0">
+                          <a:latin typeface="Cambria Math" panose="02040503050406030204" pitchFamily="18" charset="0"/>
+                        </a:rPr>
+                        <m:t> </m:t>
+                      </m:r>
+                      <m:r>
+                        <m:rPr>
+                          <m:nor/>
+                        </m:rPr>
+                        <a:rPr lang="es-CO" i="1" smtClean="0">
+                          <a:latin typeface="Cambria Math" panose="02040503050406030204" pitchFamily="18" charset="0"/>
+                        </a:rPr>
+                        <m:t>de</m:t>
+                      </m:r>
+                      <m:r>
+                        <m:rPr>
+                          <m:nor/>
+                        </m:rPr>
+                        <a:rPr lang="es-CO" i="1" smtClean="0">
+                          <a:latin typeface="Cambria Math" panose="02040503050406030204" pitchFamily="18" charset="0"/>
+                        </a:rPr>
+                        <m:t> </m:t>
+                      </m:r>
+                      <m:r>
+                        <m:rPr>
+                          <m:nor/>
+                        </m:rPr>
+                        <a:rPr lang="es-CO" i="1" smtClean="0">
+                          <a:latin typeface="Cambria Math" panose="02040503050406030204" pitchFamily="18" charset="0"/>
+                        </a:rPr>
+                        <m:t>Pobreza</m:t>
+                      </m:r>
+                      <m:r>
+                        <m:rPr>
+                          <m:nor/>
+                        </m:rPr>
+                        <a:rPr lang="es-CO" i="1" smtClean="0">
+                          <a:latin typeface="Cambria Math" panose="02040503050406030204" pitchFamily="18" charset="0"/>
+                        </a:rPr>
+                        <m:t>)</m:t>
+                      </m:r>
+                    </m:oMath>
+                  </m:oMathPara>
+                </a14:m>
+                <a:endParaRPr lang="es-CO" i="1" dirty="0">
+                  <a:latin typeface="Cambria Math" panose="02040503050406030204" pitchFamily="18" charset="0"/>
+                </a:endParaRPr>
+              </a:p>
+              <a:p>
+                <a:r>
+                  <a:rPr lang="es-CO" dirty="0" smtClean="0"/>
+                  <a:t>Donde, </a:t>
+                </a:r>
+                <a14:m>
+                  <m:oMath xmlns:m="http://schemas.openxmlformats.org/officeDocument/2006/math">
+                    <m:r>
+                      <a:rPr lang="es-CO" b="0" i="1" smtClean="0">
+                        <a:latin typeface="Cambria Math" panose="02040503050406030204" pitchFamily="18" charset="0"/>
+                      </a:rPr>
+                      <m:t>𝐼</m:t>
+                    </m:r>
+                    <m:d>
+                      <m:dPr>
+                        <m:ctrlPr>
+                          <a:rPr lang="es-CO" b="0" i="1" smtClean="0">
+                            <a:latin typeface="Cambria Math" panose="02040503050406030204" pitchFamily="18" charset="0"/>
+                          </a:rPr>
+                        </m:ctrlPr>
+                      </m:dPr>
+                      <m:e>
+                        <m:r>
+                          <a:rPr lang="es-CO" b="0" i="1" smtClean="0">
+                            <a:latin typeface="Cambria Math" panose="02040503050406030204" pitchFamily="18" charset="0"/>
+                          </a:rPr>
+                          <m:t>𝐹𝑢𝑛𝑐𝑖</m:t>
+                        </m:r>
+                        <m:r>
+                          <a:rPr lang="es-CO" b="0" i="1" smtClean="0">
+                            <a:latin typeface="Cambria Math" panose="02040503050406030204" pitchFamily="18" charset="0"/>
+                          </a:rPr>
+                          <m:t>ó</m:t>
+                        </m:r>
+                        <m:r>
+                          <a:rPr lang="es-CO" b="0" i="1" smtClean="0">
+                            <a:latin typeface="Cambria Math" panose="02040503050406030204" pitchFamily="18" charset="0"/>
+                          </a:rPr>
+                          <m:t>𝑛</m:t>
+                        </m:r>
+                        <m:r>
+                          <a:rPr lang="es-CO" b="0" i="1" smtClean="0">
+                            <a:latin typeface="Cambria Math" panose="02040503050406030204" pitchFamily="18" charset="0"/>
+                          </a:rPr>
+                          <m:t> </m:t>
+                        </m:r>
+                        <m:r>
+                          <a:rPr lang="es-CO" b="0" i="1" smtClean="0">
+                            <a:latin typeface="Cambria Math" panose="02040503050406030204" pitchFamily="18" charset="0"/>
+                          </a:rPr>
+                          <m:t>𝑖𝑛𝑑𝑖𝑐𝑎𝑑𝑜𝑟𝑎</m:t>
+                        </m:r>
+                      </m:e>
+                    </m:d>
+                    <m:r>
+                      <a:rPr lang="es-CO" b="0" i="1" smtClean="0">
+                        <a:latin typeface="Cambria Math" panose="02040503050406030204" pitchFamily="18" charset="0"/>
+                      </a:rPr>
+                      <m:t>=</m:t>
+                    </m:r>
+                    <m:d>
+                      <m:dPr>
+                        <m:begChr m:val="{"/>
+                        <m:endChr m:val="}"/>
+                        <m:ctrlPr>
+                          <a:rPr lang="es-CO" b="0" i="1" smtClean="0">
+                            <a:latin typeface="Cambria Math" panose="02040503050406030204" pitchFamily="18" charset="0"/>
+                          </a:rPr>
+                        </m:ctrlPr>
+                      </m:dPr>
+                      <m:e>
+                        <m:f>
+                          <m:fPr>
+                            <m:ctrlPr>
+                              <a:rPr lang="es-CO" b="0" i="1" smtClean="0">
+                                <a:latin typeface="Cambria Math" panose="02040503050406030204" pitchFamily="18" charset="0"/>
+                              </a:rPr>
+                            </m:ctrlPr>
+                          </m:fPr>
+                          <m:num>
+                            <m:r>
+                              <a:rPr lang="es-CO" b="0" i="1" smtClean="0">
+                                <a:latin typeface="Cambria Math" panose="02040503050406030204" pitchFamily="18" charset="0"/>
+                              </a:rPr>
+                              <m:t>1,   </m:t>
+                            </m:r>
+                            <m:r>
+                              <a:rPr lang="es-CO" b="0" i="1" smtClean="0">
+                                <a:latin typeface="Cambria Math" panose="02040503050406030204" pitchFamily="18" charset="0"/>
+                              </a:rPr>
+                              <m:t>𝑖𝑛𝑔𝑟𝑒𝑠𝑜</m:t>
+                            </m:r>
+                            <m:r>
+                              <a:rPr lang="es-CO" b="0" i="1" smtClean="0">
+                                <a:latin typeface="Cambria Math" panose="02040503050406030204" pitchFamily="18" charset="0"/>
+                              </a:rPr>
+                              <m:t> </m:t>
+                            </m:r>
+                            <m:r>
+                              <a:rPr lang="es-CO" b="0" i="1" smtClean="0">
+                                <a:latin typeface="Cambria Math" panose="02040503050406030204" pitchFamily="18" charset="0"/>
+                              </a:rPr>
+                              <m:t>𝑖𝑛𝑓𝑒𝑟𝑖𝑜𝑟</m:t>
+                            </m:r>
+                            <m:r>
+                              <a:rPr lang="es-CO" b="0" i="1" smtClean="0">
+                                <a:latin typeface="Cambria Math" panose="02040503050406030204" pitchFamily="18" charset="0"/>
+                              </a:rPr>
+                              <m:t> </m:t>
+                            </m:r>
+                            <m:r>
+                              <a:rPr lang="es-CO" b="0" i="1" smtClean="0">
+                                <a:latin typeface="Cambria Math" panose="02040503050406030204" pitchFamily="18" charset="0"/>
+                              </a:rPr>
+                              <m:t>𝑎</m:t>
+                            </m:r>
+                            <m:r>
+                              <a:rPr lang="es-CO" b="0" i="1" smtClean="0">
+                                <a:latin typeface="Cambria Math" panose="02040503050406030204" pitchFamily="18" charset="0"/>
+                              </a:rPr>
+                              <m:t> </m:t>
+                            </m:r>
+                            <m:r>
+                              <a:rPr lang="es-CO" b="0" i="1" smtClean="0">
+                                <a:latin typeface="Cambria Math" panose="02040503050406030204" pitchFamily="18" charset="0"/>
+                              </a:rPr>
+                              <m:t>𝑙𝑎</m:t>
+                            </m:r>
+                            <m:r>
+                              <a:rPr lang="es-CO" b="0" i="1" smtClean="0">
+                                <a:latin typeface="Cambria Math" panose="02040503050406030204" pitchFamily="18" charset="0"/>
+                              </a:rPr>
+                              <m:t> </m:t>
+                            </m:r>
+                            <m:r>
+                              <a:rPr lang="es-CO" b="0" i="1" smtClean="0">
+                                <a:latin typeface="Cambria Math" panose="02040503050406030204" pitchFamily="18" charset="0"/>
+                              </a:rPr>
+                              <m:t>𝐿</m:t>
+                            </m:r>
+                            <m:r>
+                              <a:rPr lang="es-CO" b="0" i="1" smtClean="0">
+                                <a:latin typeface="Cambria Math" panose="02040503050406030204" pitchFamily="18" charset="0"/>
+                              </a:rPr>
+                              <m:t>í</m:t>
+                            </m:r>
+                            <m:r>
+                              <a:rPr lang="es-CO" b="0" i="1" smtClean="0">
+                                <a:latin typeface="Cambria Math" panose="02040503050406030204" pitchFamily="18" charset="0"/>
+                              </a:rPr>
+                              <m:t>𝑛𝑒𝑎</m:t>
+                            </m:r>
+                            <m:r>
+                              <a:rPr lang="es-CO" b="0" i="1" smtClean="0">
+                                <a:latin typeface="Cambria Math" panose="02040503050406030204" pitchFamily="18" charset="0"/>
+                              </a:rPr>
+                              <m:t> </m:t>
+                            </m:r>
+                            <m:r>
+                              <a:rPr lang="es-CO" b="0" i="1" smtClean="0">
+                                <a:latin typeface="Cambria Math" panose="02040503050406030204" pitchFamily="18" charset="0"/>
+                              </a:rPr>
+                              <m:t>𝑑𝑒</m:t>
+                            </m:r>
+                            <m:r>
+                              <a:rPr lang="es-CO" b="0" i="1" smtClean="0">
+                                <a:latin typeface="Cambria Math" panose="02040503050406030204" pitchFamily="18" charset="0"/>
+                              </a:rPr>
+                              <m:t> </m:t>
+                            </m:r>
+                            <m:r>
+                              <a:rPr lang="es-CO" b="0" i="1" smtClean="0">
+                                <a:latin typeface="Cambria Math" panose="02040503050406030204" pitchFamily="18" charset="0"/>
+                              </a:rPr>
+                              <m:t>𝑃𝑜𝑏𝑟𝑒𝑧𝑎</m:t>
+                            </m:r>
+                            <m:r>
+                              <a:rPr lang="es-CO" b="0" i="1" smtClean="0">
+                                <a:latin typeface="Cambria Math" panose="02040503050406030204" pitchFamily="18" charset="0"/>
+                              </a:rPr>
+                              <m:t> (</m:t>
+                            </m:r>
+                            <m:r>
+                              <a:rPr lang="es-CO" b="0" i="1" smtClean="0">
+                                <a:latin typeface="Cambria Math" panose="02040503050406030204" pitchFamily="18" charset="0"/>
+                              </a:rPr>
+                              <m:t>𝑃𝑜𝑏𝑟𝑒</m:t>
+                            </m:r>
+                            <m:r>
+                              <a:rPr lang="es-CO" b="0" i="1" smtClean="0">
+                                <a:latin typeface="Cambria Math" panose="02040503050406030204" pitchFamily="18" charset="0"/>
+                              </a:rPr>
+                              <m:t>)</m:t>
+                            </m:r>
+                          </m:num>
+                          <m:den>
+                            <m:r>
+                              <a:rPr lang="es-CO" b="0" i="1" smtClean="0">
+                                <a:latin typeface="Cambria Math" panose="02040503050406030204" pitchFamily="18" charset="0"/>
+                              </a:rPr>
+                              <m:t>0,     </m:t>
+                            </m:r>
+                            <m:r>
+                              <a:rPr lang="es-CO" i="1">
+                                <a:latin typeface="Cambria Math" panose="02040503050406030204" pitchFamily="18" charset="0"/>
+                              </a:rPr>
+                              <m:t>𝑖𝑛𝑔𝑟𝑒𝑠𝑜</m:t>
+                            </m:r>
+                            <m:r>
+                              <a:rPr lang="es-CO" i="1">
+                                <a:latin typeface="Cambria Math" panose="02040503050406030204" pitchFamily="18" charset="0"/>
+                              </a:rPr>
+                              <m:t> </m:t>
+                            </m:r>
+                            <m:r>
+                              <a:rPr lang="es-CO" b="0" i="1" smtClean="0">
+                                <a:latin typeface="Cambria Math" panose="02040503050406030204" pitchFamily="18" charset="0"/>
+                              </a:rPr>
+                              <m:t>𝑠𝑢𝑝𝑒𝑟𝑖𝑜𝑟</m:t>
+                            </m:r>
+                            <m:r>
+                              <a:rPr lang="es-CO" i="1">
+                                <a:latin typeface="Cambria Math" panose="02040503050406030204" pitchFamily="18" charset="0"/>
+                              </a:rPr>
+                              <m:t> </m:t>
+                            </m:r>
+                            <m:r>
+                              <a:rPr lang="es-CO" i="1">
+                                <a:latin typeface="Cambria Math" panose="02040503050406030204" pitchFamily="18" charset="0"/>
+                              </a:rPr>
+                              <m:t>𝑎</m:t>
+                            </m:r>
+                            <m:r>
+                              <a:rPr lang="es-CO" i="1">
+                                <a:latin typeface="Cambria Math" panose="02040503050406030204" pitchFamily="18" charset="0"/>
+                              </a:rPr>
+                              <m:t> </m:t>
+                            </m:r>
+                            <m:r>
+                              <a:rPr lang="es-CO" i="1">
+                                <a:latin typeface="Cambria Math" panose="02040503050406030204" pitchFamily="18" charset="0"/>
+                              </a:rPr>
+                              <m:t>𝑙𝑎</m:t>
+                            </m:r>
+                            <m:r>
+                              <a:rPr lang="es-CO" i="1">
+                                <a:latin typeface="Cambria Math" panose="02040503050406030204" pitchFamily="18" charset="0"/>
+                              </a:rPr>
+                              <m:t> </m:t>
+                            </m:r>
+                            <m:r>
+                              <a:rPr lang="es-CO" i="1">
+                                <a:latin typeface="Cambria Math" panose="02040503050406030204" pitchFamily="18" charset="0"/>
+                              </a:rPr>
+                              <m:t>𝐿</m:t>
+                            </m:r>
+                            <m:r>
+                              <a:rPr lang="es-CO" i="1">
+                                <a:latin typeface="Cambria Math" panose="02040503050406030204" pitchFamily="18" charset="0"/>
+                              </a:rPr>
+                              <m:t>í</m:t>
+                            </m:r>
+                            <m:r>
+                              <a:rPr lang="es-CO" i="1">
+                                <a:latin typeface="Cambria Math" panose="02040503050406030204" pitchFamily="18" charset="0"/>
+                              </a:rPr>
+                              <m:t>𝑛𝑒𝑎</m:t>
+                            </m:r>
+                            <m:r>
+                              <a:rPr lang="es-CO" i="1">
+                                <a:latin typeface="Cambria Math" panose="02040503050406030204" pitchFamily="18" charset="0"/>
+                              </a:rPr>
+                              <m:t> </m:t>
+                            </m:r>
+                            <m:r>
+                              <a:rPr lang="es-CO" i="1">
+                                <a:latin typeface="Cambria Math" panose="02040503050406030204" pitchFamily="18" charset="0"/>
+                              </a:rPr>
+                              <m:t>𝑑𝑒</m:t>
+                            </m:r>
+                            <m:r>
+                              <a:rPr lang="es-CO" i="1">
+                                <a:latin typeface="Cambria Math" panose="02040503050406030204" pitchFamily="18" charset="0"/>
+                              </a:rPr>
+                              <m:t> </m:t>
+                            </m:r>
+                            <m:r>
+                              <a:rPr lang="es-CO" i="1">
+                                <a:latin typeface="Cambria Math" panose="02040503050406030204" pitchFamily="18" charset="0"/>
+                              </a:rPr>
+                              <m:t>𝑃𝑜𝑏𝑟𝑒𝑧𝑎</m:t>
+                            </m:r>
+                            <m:r>
+                              <a:rPr lang="es-CO" i="1">
+                                <a:latin typeface="Cambria Math" panose="02040503050406030204" pitchFamily="18" charset="0"/>
+                              </a:rPr>
+                              <m:t> (</m:t>
+                            </m:r>
+                            <m:r>
+                              <a:rPr lang="es-CO" b="0" i="1" smtClean="0">
+                                <a:latin typeface="Cambria Math" panose="02040503050406030204" pitchFamily="18" charset="0"/>
+                              </a:rPr>
+                              <m:t>𝑁𝑜</m:t>
+                            </m:r>
+                            <m:r>
+                              <a:rPr lang="es-CO" b="0" i="1" smtClean="0">
+                                <a:latin typeface="Cambria Math" panose="02040503050406030204" pitchFamily="18" charset="0"/>
+                              </a:rPr>
+                              <m:t> </m:t>
+                            </m:r>
+                            <m:r>
+                              <a:rPr lang="es-CO" i="1">
+                                <a:latin typeface="Cambria Math" panose="02040503050406030204" pitchFamily="18" charset="0"/>
+                              </a:rPr>
+                              <m:t>𝑃𝑜𝑏𝑟𝑒</m:t>
+                            </m:r>
+                            <m:r>
+                              <a:rPr lang="es-CO" i="1">
+                                <a:latin typeface="Cambria Math" panose="02040503050406030204" pitchFamily="18" charset="0"/>
+                              </a:rPr>
+                              <m:t>)</m:t>
+                            </m:r>
+                          </m:den>
+                        </m:f>
+                      </m:e>
+                    </m:d>
+                  </m:oMath>
+                </a14:m>
+                <a:endParaRPr lang="es-CO" dirty="0"/>
+              </a:p>
+            </p:txBody>
+          </p:sp>
+        </mc:Choice>
+        <mc:Fallback>
+          <p:sp>
+            <p:nvSpPr>
+              <p:cNvPr id="5" name="CuadroTexto 4"/>
+              <p:cNvSpPr txBox="1">
+                <a:spLocks noRot="1" noChangeAspect="1" noMove="1" noResize="1" noEditPoints="1" noAdjustHandles="1" noChangeArrowheads="1" noChangeShapeType="1" noTextEdit="1"/>
+              </p:cNvSpPr>
+              <p:nvPr/>
+            </p:nvSpPr>
+            <p:spPr>
+              <a:xfrm>
+                <a:off x="251520" y="1700808"/>
+                <a:ext cx="8424936" cy="811441"/>
+              </a:xfrm>
+              <a:prstGeom prst="rect">
+                <a:avLst/>
+              </a:prstGeom>
+              <a:blipFill>
+                <a:blip r:embed="rId3"/>
+                <a:stretch>
+                  <a:fillRect l="-579" b="-3759"/>
+                </a:stretch>
+              </a:blipFill>
+            </p:spPr>
+            <p:txBody>
+              <a:bodyPr/>
+              <a:lstStyle/>
+              <a:p>
+                <a:r>
+                  <a:rPr lang="es-CO">
+                    <a:noFill/>
+                  </a:rPr>
+                  <a:t> </a:t>
+                </a:r>
+              </a:p>
+            </p:txBody>
+          </p:sp>
+        </mc:Fallback>
+      </mc:AlternateContent>
+    </p:spTree>
+    <p:extLst>
+      <p:ext uri="{BB962C8B-B14F-4D97-AF65-F5344CB8AC3E}">
+        <p14:creationId xmlns:p14="http://schemas.microsoft.com/office/powerpoint/2010/main" val="3622499067"/>
       </p:ext>
     </p:extLst>
   </p:cSld>

--- a/Presentaciones/data_equipo_08.pptx
+++ b/Presentaciones/data_equipo_08.pptx
@@ -3738,8 +3738,9 @@
           <a:p>
             <a:r>
               <a:rPr lang="es-CO" dirty="0" smtClean="0"/>
-              <a:t>Especificación</a:t>
-            </a:r>
+              <a:t>Especificación del modelo</a:t>
+            </a:r>
+            <a:endParaRPr lang="es-CO" dirty="0" smtClean="0"/>
           </a:p>
           <a:p>
             <a:r>
@@ -3754,6 +3755,30 @@
           </a:p>
         </p:txBody>
       </p:sp>
+      <p:pic>
+        <p:nvPicPr>
+          <p:cNvPr id="4" name="Imagen 3"/>
+          <p:cNvPicPr>
+            <a:picLocks noChangeAspect="1"/>
+          </p:cNvPicPr>
+          <p:nvPr/>
+        </p:nvPicPr>
+        <p:blipFill>
+          <a:blip r:embed="rId2"/>
+          <a:stretch>
+            <a:fillRect/>
+          </a:stretch>
+        </p:blipFill>
+        <p:spPr>
+          <a:xfrm>
+            <a:off x="899592" y="5013176"/>
+            <a:ext cx="8030096" cy="1457528"/>
+          </a:xfrm>
+          <a:prstGeom prst="rect">
+            <a:avLst/>
+          </a:prstGeom>
+        </p:spPr>
+      </p:pic>
     </p:spTree>
     <p:extLst>
       <p:ext uri="{BB962C8B-B14F-4D97-AF65-F5344CB8AC3E}">
@@ -4676,8 +4701,8 @@
           </a:xfrm>
         </p:spPr>
       </p:pic>
-      <mc:AlternateContent xmlns:mc="http://schemas.openxmlformats.org/markup-compatibility/2006">
-        <mc:Choice xmlns:a14="http://schemas.microsoft.com/office/drawing/2010/main" Requires="a14">
+      <mc:AlternateContent xmlns:mc="http://schemas.openxmlformats.org/markup-compatibility/2006" xmlns:a14="http://schemas.microsoft.com/office/drawing/2010/main">
+        <mc:Choice Requires="a14">
           <p:sp>
             <p:nvSpPr>
               <p:cNvPr id="5" name="CuadroTexto 4"/>
@@ -4700,6 +4725,7 @@
               </a:bodyPr>
               <a:lstStyle/>
               <a:p>
+                <a:pPr/>
                 <a14:m>
                   <m:oMathPara xmlns:m="http://schemas.openxmlformats.org/officeDocument/2006/math">
                     <m:oMathParaPr>
@@ -4740,7 +4766,7 @@
                         <a:rPr lang="es-CO" i="1" smtClean="0">
                           <a:latin typeface="Cambria Math" panose="02040503050406030204" pitchFamily="18" charset="0"/>
                         </a:rPr>
-                        <m:t>*(</m:t>
+                        <m:t>∗(</m:t>
                       </m:r>
                       <m:r>
                         <m:rPr>
@@ -5172,7 +5198,7 @@
             </p:txBody>
           </p:sp>
         </mc:Choice>
-        <mc:Fallback>
+        <mc:Fallback xmlns="">
           <p:sp>
             <p:nvSpPr>
               <p:cNvPr id="5" name="CuadroTexto 4"/>

--- a/Presentaciones/data_equipo_08.pptx
+++ b/Presentaciones/data_equipo_08.pptx
@@ -286,7 +286,7 @@
               <a:pPr>
                 <a:defRPr/>
               </a:pPr>
-              <a:t>19/10/2025</a:t>
+              <a:t>20/10/2025</a:t>
             </a:fld>
             <a:endParaRPr lang="es-CO"/>
           </a:p>
@@ -718,7 +718,7 @@
                 <a:spcPct val="0"/>
               </a:spcBef>
             </a:pPr>
-            <a:endParaRPr lang="es-CO" altLang="es-CO" smtClean="0"/>
+            <a:endParaRPr lang="es-CO" altLang="es-CO"/>
           </a:p>
         </p:txBody>
       </p:sp>
@@ -884,7 +884,7 @@
               </a:pPr>
               <a:t>1</a:t>
             </a:fld>
-            <a:endParaRPr lang="es-CO" altLang="es-CO" smtClean="0"/>
+            <a:endParaRPr lang="es-CO" altLang="es-CO"/>
           </a:p>
         </p:txBody>
       </p:sp>
@@ -3504,30 +3504,22 @@
               <a:rPr lang="es-CO" altLang="es-CO" dirty="0"/>
             </a:br>
             <a:r>
-              <a:rPr lang="es-CO" altLang="es-CO" dirty="0" smtClean="0"/>
+              <a:rPr lang="es-CO" altLang="es-CO" dirty="0"/>
               <a:t>LAURA DANIELA DIAZ TORRES</a:t>
-            </a:r>
-            <a:br>
-              <a:rPr lang="es-CO" altLang="es-CO" dirty="0" smtClean="0"/>
-            </a:br>
-            <a:r>
-              <a:rPr lang="es-CO" altLang="es-CO" dirty="0" smtClean="0"/>
-              <a:t>CRISTIAN FELIPE MUÑOZ </a:t>
-            </a:r>
-            <a:r>
-              <a:rPr lang="es-CO" altLang="es-CO" dirty="0"/>
-              <a:t>GUERRERO</a:t>
             </a:r>
             <a:br>
               <a:rPr lang="es-CO" altLang="es-CO" dirty="0"/>
             </a:br>
             <a:r>
               <a:rPr lang="es-CO" altLang="es-CO" dirty="0"/>
-              <a:t>ZENNETH OLIVERO </a:t>
-            </a:r>
-            <a:r>
-              <a:rPr lang="es-CO" altLang="es-CO" dirty="0" smtClean="0"/>
-              <a:t>TAPIA</a:t>
+              <a:t>CRISTIAN FELIPE MUÑOZ GUERRERO</a:t>
+            </a:r>
+            <a:br>
+              <a:rPr lang="es-CO" altLang="es-CO" dirty="0"/>
+            </a:br>
+            <a:r>
+              <a:rPr lang="es-CO" altLang="es-CO" dirty="0"/>
+              <a:t>ZENNETH OLIVERO TAPIA</a:t>
             </a:r>
           </a:p>
         </p:txBody>
@@ -3567,63 +3559,26 @@
               <a:defRPr/>
             </a:pPr>
             <a:r>
-              <a:rPr lang="es-CO" b="1" dirty="0" err="1" smtClean="0"/>
+              <a:rPr lang="es-CO" b="1" dirty="0" err="1"/>
               <a:t>Problem</a:t>
             </a:r>
             <a:r>
-              <a:rPr lang="es-CO" b="1" dirty="0" smtClean="0"/>
+              <a:rPr lang="es-CO" b="1" dirty="0"/>
               <a:t> Set 2 – </a:t>
             </a:r>
             <a:r>
-              <a:rPr lang="es-CO" b="1" dirty="0" err="1" smtClean="0"/>
+              <a:rPr lang="es-CO" b="1" dirty="0" err="1"/>
               <a:t>Predicting</a:t>
             </a:r>
             <a:r>
-              <a:rPr lang="es-CO" b="1" dirty="0" smtClean="0"/>
+              <a:rPr lang="es-CO" b="1" dirty="0"/>
               <a:t> </a:t>
             </a:r>
             <a:r>
-              <a:rPr lang="es-CO" b="1" dirty="0" err="1" smtClean="0"/>
+              <a:rPr lang="es-CO" b="1" dirty="0" err="1"/>
               <a:t>Poverty</a:t>
             </a:r>
             <a:endParaRPr lang="es-CO" b="1" dirty="0"/>
-          </a:p>
-          <a:p>
-            <a:pPr eaLnBrk="1" fontAlgn="auto" hangingPunct="1">
-              <a:spcAft>
-                <a:spcPts val="0"/>
-              </a:spcAft>
-              <a:defRPr/>
-            </a:pPr>
-            <a:endParaRPr lang="es-CO" b="1" dirty="0" smtClean="0"/>
-          </a:p>
-          <a:p>
-            <a:pPr eaLnBrk="1" fontAlgn="auto" hangingPunct="1">
-              <a:spcAft>
-                <a:spcPts val="0"/>
-              </a:spcAft>
-              <a:defRPr/>
-            </a:pPr>
-            <a:r>
-              <a:rPr lang="es-CO" b="1" dirty="0" smtClean="0"/>
-              <a:t>BIG </a:t>
-            </a:r>
-            <a:r>
-              <a:rPr lang="es-CO" b="1" dirty="0"/>
-              <a:t>DATA Y MACHINE LEARNING PARA ECONOMIA APLICADA</a:t>
-            </a:r>
-          </a:p>
-          <a:p>
-            <a:pPr eaLnBrk="1" fontAlgn="auto" hangingPunct="1">
-              <a:spcAft>
-                <a:spcPts val="0"/>
-              </a:spcAft>
-              <a:defRPr/>
-            </a:pPr>
-            <a:r>
-              <a:rPr lang="es-CO" b="1" dirty="0" smtClean="0"/>
-              <a:t>2025-02</a:t>
-            </a:r>
           </a:p>
           <a:p>
             <a:pPr eaLnBrk="1" fontAlgn="auto" hangingPunct="1">
@@ -3642,8 +3597,8 @@
               <a:defRPr/>
             </a:pPr>
             <a:r>
-              <a:rPr lang="es-CO" dirty="0" smtClean="0"/>
-              <a:t>data_equipo_08</a:t>
+              <a:rPr lang="es-CO" b="1" dirty="0"/>
+              <a:t>BIG DATA Y MACHINE LEARNING PARA ECONOMIA APLICADA</a:t>
             </a:r>
           </a:p>
           <a:p>
@@ -3654,10 +3609,42 @@
               <a:defRPr/>
             </a:pPr>
             <a:r>
-              <a:rPr lang="es-CO" b="1" dirty="0" smtClean="0"/>
+              <a:rPr lang="es-CO" b="1" dirty="0"/>
+              <a:t>2025-02</a:t>
+            </a:r>
+          </a:p>
+          <a:p>
+            <a:pPr eaLnBrk="1" fontAlgn="auto" hangingPunct="1">
+              <a:spcAft>
+                <a:spcPts val="0"/>
+              </a:spcAft>
+              <a:defRPr/>
+            </a:pPr>
+            <a:endParaRPr lang="es-CO" b="1" dirty="0"/>
+          </a:p>
+          <a:p>
+            <a:pPr eaLnBrk="1" fontAlgn="auto" hangingPunct="1">
+              <a:spcAft>
+                <a:spcPts val="0"/>
+              </a:spcAft>
+              <a:defRPr/>
+            </a:pPr>
+            <a:r>
+              <a:rPr lang="es-CO" dirty="0"/>
+              <a:t>data_equipo_08</a:t>
+            </a:r>
+          </a:p>
+          <a:p>
+            <a:pPr eaLnBrk="1" fontAlgn="auto" hangingPunct="1">
+              <a:spcAft>
+                <a:spcPts val="0"/>
+              </a:spcAft>
+              <a:defRPr/>
+            </a:pPr>
+            <a:r>
+              <a:rPr lang="es-CO" b="1" dirty="0"/>
               <a:t>Limpieza de datos, construcción y transformación de variables, definición de bases de datos finales.</a:t>
             </a:r>
-            <a:endParaRPr lang="es-CO" b="1" dirty="0"/>
           </a:p>
         </p:txBody>
       </p:sp>
@@ -3671,13 +3658,6 @@
   <p:clrMapOvr>
     <a:masterClrMapping/>
   </p:clrMapOvr>
-  <p:timing>
-    <p:tnLst>
-      <p:par>
-        <p:cTn id="1" dur="indefinite" restart="never" nodeType="tmRoot"/>
-      </p:par>
-    </p:tnLst>
-  </p:timing>
 </p:sld>
 </file>
 
@@ -3698,87 +3678,147 @@
           <a:chExt cx="0" cy="0"/>
         </a:xfrm>
       </p:grpSpPr>
-      <p:sp>
-        <p:nvSpPr>
-          <p:cNvPr id="2" name="Título 1"/>
-          <p:cNvSpPr>
-            <a:spLocks noGrp="1"/>
-          </p:cNvSpPr>
-          <p:nvPr>
-            <p:ph type="title"/>
-          </p:nvPr>
-        </p:nvSpPr>
-        <p:spPr/>
-        <p:txBody>
-          <a:bodyPr/>
-          <a:lstStyle/>
-          <a:p>
-            <a:r>
-              <a:rPr lang="es-CO" dirty="0" smtClean="0"/>
-              <a:t>Mejor Modelo de Predicción</a:t>
-            </a:r>
-            <a:endParaRPr lang="es-CO" dirty="0"/>
-          </a:p>
-        </p:txBody>
-      </p:sp>
-      <p:sp>
-        <p:nvSpPr>
-          <p:cNvPr id="3" name="Marcador de contenido 2"/>
-          <p:cNvSpPr>
-            <a:spLocks noGrp="1"/>
-          </p:cNvSpPr>
-          <p:nvPr>
-            <p:ph idx="1"/>
-          </p:nvPr>
-        </p:nvSpPr>
-        <p:spPr/>
-        <p:txBody>
-          <a:bodyPr/>
-          <a:lstStyle/>
-          <a:p>
-            <a:r>
-              <a:rPr lang="es-CO" dirty="0" smtClean="0"/>
-              <a:t>Especificación del modelo</a:t>
-            </a:r>
-            <a:endParaRPr lang="es-CO" dirty="0" smtClean="0"/>
-          </a:p>
-          <a:p>
-            <a:r>
-              <a:rPr lang="es-CO" dirty="0" err="1" smtClean="0"/>
-              <a:t>Kaggle</a:t>
-            </a:r>
-            <a:r>
-              <a:rPr lang="es-CO" dirty="0" smtClean="0"/>
-              <a:t> Score</a:t>
-            </a:r>
-            <a:endParaRPr lang="es-CO" dirty="0"/>
-          </a:p>
-        </p:txBody>
-      </p:sp>
       <p:pic>
         <p:nvPicPr>
-          <p:cNvPr id="4" name="Imagen 3"/>
+          <p:cNvPr id="6" name="Imagen 5">
+            <a:extLst>
+              <a:ext uri="{FF2B5EF4-FFF2-40B4-BE49-F238E27FC236}">
+                <a16:creationId xmlns:a16="http://schemas.microsoft.com/office/drawing/2014/main" id="{09B7B26F-FFD6-56DF-2777-46F1209C8AA0}"/>
+              </a:ext>
+            </a:extLst>
+          </p:cNvPr>
           <p:cNvPicPr>
             <a:picLocks noChangeAspect="1"/>
           </p:cNvPicPr>
           <p:nvPr/>
         </p:nvPicPr>
         <p:blipFill>
-          <a:blip r:embed="rId2"/>
+          <a:blip r:embed="rId2">
+            <a:extLst>
+              <a:ext uri="{28A0092B-C50C-407E-A947-70E740481C1C}">
+                <a14:useLocalDpi xmlns:a14="http://schemas.microsoft.com/office/drawing/2010/main" val="0"/>
+              </a:ext>
+            </a:extLst>
+          </a:blip>
           <a:stretch>
             <a:fillRect/>
           </a:stretch>
         </p:blipFill>
         <p:spPr>
           <a:xfrm>
-            <a:off x="899592" y="5013176"/>
-            <a:ext cx="8030096" cy="1457528"/>
+            <a:off x="736764" y="2443364"/>
+            <a:ext cx="8407236" cy="2463861"/>
           </a:xfrm>
           <a:prstGeom prst="rect">
             <a:avLst/>
           </a:prstGeom>
         </p:spPr>
       </p:pic>
+      <p:sp>
+        <p:nvSpPr>
+          <p:cNvPr id="9" name="Título 1">
+            <a:extLst>
+              <a:ext uri="{FF2B5EF4-FFF2-40B4-BE49-F238E27FC236}">
+                <a16:creationId xmlns:a16="http://schemas.microsoft.com/office/drawing/2014/main" id="{23C73C8E-6C08-A6DF-5824-FAEB24E8DFEC}"/>
+              </a:ext>
+            </a:extLst>
+          </p:cNvPr>
+          <p:cNvSpPr>
+            <a:spLocks noGrp="1"/>
+          </p:cNvSpPr>
+          <p:nvPr>
+            <p:ph type="title"/>
+          </p:nvPr>
+        </p:nvSpPr>
+        <p:spPr>
+          <a:xfrm>
+            <a:off x="611560" y="1916832"/>
+            <a:ext cx="8229600" cy="500063"/>
+          </a:xfrm>
+        </p:spPr>
+        <p:txBody>
+          <a:bodyPr/>
+          <a:lstStyle/>
+          <a:p>
+            <a:pPr algn="ctr"/>
+            <a:r>
+              <a:rPr lang="es-CO" altLang="es-CO" dirty="0" err="1"/>
+              <a:t>Best</a:t>
+            </a:r>
+            <a:r>
+              <a:rPr lang="es-CO" altLang="es-CO" dirty="0"/>
+              <a:t> </a:t>
+            </a:r>
+            <a:r>
+              <a:rPr lang="es-CO" altLang="es-CO" dirty="0" err="1"/>
+              <a:t>model</a:t>
+            </a:r>
+            <a:r>
+              <a:rPr lang="es-CO" altLang="es-CO" dirty="0"/>
+              <a:t> </a:t>
+            </a:r>
+            <a:r>
+              <a:rPr lang="es-CO" altLang="es-CO" dirty="0" err="1"/>
+              <a:t>overview</a:t>
+            </a:r>
+            <a:r>
+              <a:rPr lang="es-CO" altLang="es-CO" dirty="0"/>
+              <a:t> – </a:t>
+            </a:r>
+            <a:r>
+              <a:rPr lang="es-CO" altLang="es-CO" dirty="0" err="1"/>
+              <a:t>XGBoost</a:t>
+            </a:r>
+            <a:r>
+              <a:rPr lang="es-CO" altLang="es-CO" dirty="0"/>
+              <a:t> + CART Ensemble</a:t>
+            </a:r>
+          </a:p>
+        </p:txBody>
+      </p:sp>
+      <p:sp>
+        <p:nvSpPr>
+          <p:cNvPr id="11" name="CuadroTexto 10">
+            <a:extLst>
+              <a:ext uri="{FF2B5EF4-FFF2-40B4-BE49-F238E27FC236}">
+                <a16:creationId xmlns:a16="http://schemas.microsoft.com/office/drawing/2014/main" id="{45F5ABE4-E37F-C457-F840-318F45C07DB3}"/>
+              </a:ext>
+            </a:extLst>
+          </p:cNvPr>
+          <p:cNvSpPr txBox="1"/>
+          <p:nvPr/>
+        </p:nvSpPr>
+        <p:spPr>
+          <a:xfrm>
+            <a:off x="1043608" y="5013176"/>
+            <a:ext cx="7165291" cy="1200329"/>
+          </a:xfrm>
+          <a:prstGeom prst="rect">
+            <a:avLst/>
+          </a:prstGeom>
+          <a:noFill/>
+        </p:spPr>
+        <p:txBody>
+          <a:bodyPr wrap="square">
+            <a:spAutoFit/>
+          </a:bodyPr>
+          <a:lstStyle/>
+          <a:p>
+            <a:r>
+              <a:rPr lang="es-ES" dirty="0"/>
+              <a:t>El modelo fue seleccionado porque logra </a:t>
+            </a:r>
+            <a:r>
+              <a:rPr lang="es-ES" b="1" dirty="0"/>
+              <a:t>mayor estabilidad y precisión</a:t>
+            </a:r>
+            <a:r>
+              <a:rPr lang="es-ES" dirty="0"/>
+              <a:t>, mejorando el F1-score frente a todos los modelos individuales y manteniendo una estructura explicativa que facilita su interpretación.</a:t>
+            </a:r>
+          </a:p>
+        </p:txBody>
+      </p:sp>
     </p:spTree>
     <p:extLst>
       <p:ext uri="{BB962C8B-B14F-4D97-AF65-F5344CB8AC3E}">
@@ -3789,13 +3829,6 @@
   <p:clrMapOvr>
     <a:masterClrMapping/>
   </p:clrMapOvr>
-  <p:timing>
-    <p:tnLst>
-      <p:par>
-        <p:cTn id="1" dur="indefinite" restart="never" nodeType="tmRoot"/>
-      </p:par>
-    </p:tnLst>
-  </p:timing>
 </p:sld>
 </file>
 
@@ -3837,10 +3870,9 @@
           <a:lstStyle/>
           <a:p>
             <a:r>
-              <a:rPr lang="es-CO" sz="2000" dirty="0" smtClean="0"/>
+              <a:rPr lang="es-CO" sz="2000" dirty="0"/>
               <a:t>BASES DE DATOS INICIALES Y EXPLORACIÓN DE VARIABLES</a:t>
             </a:r>
-            <a:endParaRPr lang="es-CO" sz="2000" dirty="0"/>
           </a:p>
         </p:txBody>
       </p:sp>
@@ -3895,14 +3927,14 @@
           <a:lstStyle/>
           <a:p>
             <a:r>
-              <a:rPr lang="es-CO" dirty="0" smtClean="0"/>
+              <a:rPr lang="es-CO" dirty="0"/>
               <a:t>Las bases de datos iniciales se obtuvieron de la competencia de </a:t>
             </a:r>
             <a:r>
-              <a:rPr lang="es-CO" dirty="0" err="1" smtClean="0"/>
+              <a:rPr lang="es-CO" dirty="0" err="1"/>
               <a:t>Kaggle</a:t>
             </a:r>
-            <a:endParaRPr lang="es-CO" dirty="0" smtClean="0"/>
+            <a:endParaRPr lang="es-CO" dirty="0"/>
           </a:p>
           <a:p>
             <a:r>
@@ -3937,10 +3969,9 @@
           <a:lstStyle/>
           <a:p>
             <a:r>
-              <a:rPr lang="es-CO" dirty="0" smtClean="0"/>
+              <a:rPr lang="es-CO" dirty="0"/>
               <a:t>Variables en común en bases de entrenamiento y de prueba en el nivel Hogares:</a:t>
             </a:r>
-            <a:endParaRPr lang="es-CO" dirty="0"/>
           </a:p>
         </p:txBody>
       </p:sp>
@@ -3984,13 +4015,6 @@
   <p:clrMapOvr>
     <a:masterClrMapping/>
   </p:clrMapOvr>
-  <p:timing>
-    <p:tnLst>
-      <p:par>
-        <p:cTn id="1" dur="indefinite" restart="never" nodeType="tmRoot"/>
-      </p:par>
-    </p:tnLst>
-  </p:timing>
 </p:sld>
 </file>
 
@@ -4035,13 +4059,7 @@
               <a:rPr lang="es-CO" dirty="0">
                 <a:latin typeface="CMR12"/>
               </a:rPr>
-              <a:t>Exploración de </a:t>
-            </a:r>
-            <a:r>
-              <a:rPr lang="es-CO" dirty="0" smtClean="0">
-                <a:latin typeface="CMR12"/>
-              </a:rPr>
-              <a:t>variables y datos faltantes en Hogares</a:t>
+              <a:t>Exploración de variables y datos faltantes en Hogares</a:t>
             </a:r>
             <a:endParaRPr lang="es-CO" dirty="0"/>
           </a:p>
@@ -4130,68 +4148,12 @@
           <a:p>
             <a:pPr algn="just"/>
             <a:r>
-              <a:rPr lang="es-CO" sz="1200" dirty="0" smtClean="0"/>
+              <a:rPr lang="es-CO" sz="1200" dirty="0"/>
               <a:t>Eliminación de variables con datos faltantes &gt;5% y</a:t>
             </a:r>
             <a:r>
-              <a:rPr lang="es-MX" sz="1200" dirty="0" smtClean="0"/>
-              <a:t> </a:t>
-            </a:r>
-            <a:r>
               <a:rPr lang="es-MX" sz="1200" dirty="0"/>
-              <a:t>aquellas que no aportan valor a la </a:t>
-            </a:r>
-            <a:r>
-              <a:rPr lang="es-MX" sz="1200" dirty="0" smtClean="0"/>
-              <a:t>predicción de la condición </a:t>
-            </a:r>
-            <a:r>
-              <a:rPr lang="es-MX" sz="1200" dirty="0"/>
-              <a:t>de pobreza, como los factores de </a:t>
-            </a:r>
-            <a:r>
-              <a:rPr lang="es-MX" sz="1200" dirty="0" smtClean="0"/>
-              <a:t>expansión</a:t>
-            </a:r>
-            <a:r>
-              <a:rPr lang="es-MX" sz="1200" dirty="0"/>
-              <a:t>, la </a:t>
-            </a:r>
-            <a:r>
-              <a:rPr lang="es-MX" sz="1200" dirty="0" smtClean="0"/>
-              <a:t>línea </a:t>
-            </a:r>
-            <a:r>
-              <a:rPr lang="es-MX" sz="1200" dirty="0"/>
-              <a:t>de pobreza (utilizada para construir </a:t>
-            </a:r>
-            <a:r>
-              <a:rPr lang="es-MX" sz="1200" dirty="0" smtClean="0"/>
-              <a:t>la variable dicótoma </a:t>
-            </a:r>
-            <a:r>
-              <a:rPr lang="es-MX" sz="1200" dirty="0"/>
-              <a:t>Pobre</a:t>
-            </a:r>
-            <a:r>
-              <a:rPr lang="es-MX" sz="1200" dirty="0" smtClean="0"/>
-              <a:t>), </a:t>
-            </a:r>
-            <a:r>
-              <a:rPr lang="es-MX" sz="1200" dirty="0"/>
-              <a:t>la </a:t>
-            </a:r>
-            <a:r>
-              <a:rPr lang="es-MX" sz="1200" dirty="0" smtClean="0"/>
-              <a:t>línea </a:t>
-            </a:r>
-            <a:r>
-              <a:rPr lang="es-MX" sz="1200" dirty="0"/>
-              <a:t>de </a:t>
-            </a:r>
-            <a:r>
-              <a:rPr lang="es-MX" sz="1200" dirty="0" smtClean="0"/>
-              <a:t>indigencia y número de personas en la unidad de gasto.</a:t>
+              <a:t> aquellas que no aportan valor a la predicción de la condición de pobreza, como los factores de expansión, la línea de pobreza (utilizada para construir la variable dicótoma Pobre), la línea de indigencia y número de personas en la unidad de gasto.</a:t>
             </a:r>
             <a:endParaRPr lang="es-CO" sz="1200" dirty="0"/>
           </a:p>
@@ -4207,13 +4169,6 @@
   <p:clrMapOvr>
     <a:masterClrMapping/>
   </p:clrMapOvr>
-  <p:timing>
-    <p:tnLst>
-      <p:par>
-        <p:cTn id="1" dur="indefinite" restart="never" nodeType="tmRoot"/>
-      </p:par>
-    </p:tnLst>
-  </p:timing>
 </p:sld>
 </file>
 
@@ -4347,99 +4302,19 @@
             <a:pPr algn="just"/>
             <a:r>
               <a:rPr lang="es-CO" sz="1400" dirty="0"/>
-              <a:t>S</a:t>
-            </a:r>
-            <a:r>
-              <a:rPr lang="es-CO" sz="1400" dirty="0" smtClean="0"/>
-              <a:t>e utilizó </a:t>
-            </a:r>
-            <a:r>
-              <a:rPr lang="es-CO" sz="1400" dirty="0"/>
-              <a:t>el </a:t>
-            </a:r>
-            <a:r>
-              <a:rPr lang="es-CO" sz="1400" dirty="0" smtClean="0"/>
-              <a:t>identificador </a:t>
-            </a:r>
-            <a:r>
-              <a:rPr lang="es-MX" sz="1400" dirty="0" smtClean="0"/>
-              <a:t>del </a:t>
+              <a:t>Se utilizó el identificador </a:t>
             </a:r>
             <a:r>
               <a:rPr lang="es-MX" sz="1400" dirty="0"/>
-              <a:t>hogar para transferir a las bases de </a:t>
-            </a:r>
-            <a:r>
-              <a:rPr lang="es-MX" sz="1400" dirty="0" smtClean="0"/>
-              <a:t>hogares la información </a:t>
+              <a:t>del hogar para transferir a las bases de hogares la información relacionada con </a:t>
+            </a:r>
+            <a:r>
+              <a:rPr lang="es-MX" sz="1400" b="1" i="1" dirty="0"/>
+              <a:t>el sexo, la edad, el nivel educativo y la actividad u ocupación del jefe del hogar</a:t>
             </a:r>
             <a:r>
               <a:rPr lang="es-MX" sz="1400" dirty="0"/>
-              <a:t>relacionada con </a:t>
-            </a:r>
-            <a:r>
-              <a:rPr lang="es-MX" sz="1400" b="1" i="1" dirty="0"/>
-              <a:t>el sexo, la edad, el </a:t>
-            </a:r>
-            <a:r>
-              <a:rPr lang="es-MX" sz="1400" b="1" i="1" dirty="0" smtClean="0"/>
-              <a:t>nivel educativo </a:t>
-            </a:r>
-            <a:r>
-              <a:rPr lang="es-MX" sz="1400" b="1" i="1" dirty="0"/>
-              <a:t>y </a:t>
-            </a:r>
-            <a:r>
-              <a:rPr lang="es-MX" sz="1400" b="1" i="1" dirty="0" smtClean="0"/>
-              <a:t>la actividad </a:t>
-            </a:r>
-            <a:r>
-              <a:rPr lang="es-MX" sz="1400" b="1" i="1" dirty="0"/>
-              <a:t>u </a:t>
-            </a:r>
-            <a:r>
-              <a:rPr lang="es-MX" sz="1400" b="1" i="1" dirty="0" smtClean="0"/>
-              <a:t>ocupación </a:t>
-            </a:r>
-            <a:r>
-              <a:rPr lang="es-MX" sz="1400" b="1" i="1" dirty="0"/>
-              <a:t>del jefe del </a:t>
-            </a:r>
-            <a:r>
-              <a:rPr lang="es-MX" sz="1400" b="1" i="1" dirty="0" smtClean="0"/>
-              <a:t>hogar</a:t>
-            </a:r>
-            <a:r>
-              <a:rPr lang="es-MX" sz="1400" dirty="0" smtClean="0"/>
-              <a:t>. Las demás </a:t>
-            </a:r>
-            <a:r>
-              <a:rPr lang="es-MX" sz="1400" dirty="0"/>
-              <a:t>variables se </a:t>
-            </a:r>
-            <a:r>
-              <a:rPr lang="es-MX" sz="1400" dirty="0" smtClean="0"/>
-              <a:t>consideran irrelevantes para </a:t>
-            </a:r>
-            <a:r>
-              <a:rPr lang="es-MX" sz="1400" dirty="0"/>
-              <a:t>el presente estudio dada la </a:t>
-            </a:r>
-            <a:r>
-              <a:rPr lang="es-MX" sz="1400" dirty="0" smtClean="0"/>
-              <a:t>información </a:t>
-            </a:r>
-            <a:r>
-              <a:rPr lang="es-MX" sz="1400" dirty="0"/>
-              <a:t>que representan y la </a:t>
-            </a:r>
-            <a:r>
-              <a:rPr lang="es-MX" sz="1400" dirty="0" smtClean="0"/>
-              <a:t>cantidad </a:t>
-            </a:r>
-            <a:r>
-              <a:rPr lang="es-MX" sz="1400" dirty="0"/>
-              <a:t>de datos faltantes.</a:t>
+              <a:t>. Las demás variables se consideran irrelevantes para el presente estudio dada la información que representan y la cantidad de datos faltantes.</a:t>
             </a:r>
             <a:endParaRPr lang="es-CO" sz="1400" dirty="0"/>
           </a:p>
@@ -4455,13 +4330,6 @@
   <p:clrMapOvr>
     <a:masterClrMapping/>
   </p:clrMapOvr>
-  <p:timing>
-    <p:tnLst>
-      <p:par>
-        <p:cTn id="1" dur="indefinite" restart="never" nodeType="tmRoot"/>
-      </p:par>
-    </p:tnLst>
-  </p:timing>
 </p:sld>
 </file>
 
@@ -4503,10 +4371,9 @@
           <a:lstStyle/>
           <a:p>
             <a:r>
-              <a:rPr lang="es-CO" dirty="0" smtClean="0"/>
+              <a:rPr lang="es-CO" dirty="0"/>
               <a:t>Bases de datos finales</a:t>
             </a:r>
-            <a:endParaRPr lang="es-CO" dirty="0"/>
           </a:p>
         </p:txBody>
       </p:sp>
@@ -4593,17 +4460,16 @@
           <a:p>
             <a:pPr algn="just"/>
             <a:r>
-              <a:rPr lang="es-CO" sz="1400" dirty="0" smtClean="0"/>
+              <a:rPr lang="es-CO" sz="1400" dirty="0"/>
               <a:t>Imputación por la moda en valores faltantes de Actividad u ocupación y Nivel educativo del jefe del hogar.</a:t>
             </a:r>
           </a:p>
           <a:p>
             <a:pPr algn="just"/>
             <a:r>
-              <a:rPr lang="es-CO" sz="1400" dirty="0" smtClean="0"/>
+              <a:rPr lang="es-CO" sz="1400" dirty="0"/>
               <a:t>Variable Pobre únicamente en base de entrenamiento.</a:t>
             </a:r>
-            <a:endParaRPr lang="es-CO" sz="1400" dirty="0"/>
           </a:p>
         </p:txBody>
       </p:sp>
@@ -4617,13 +4483,6 @@
   <p:clrMapOvr>
     <a:masterClrMapping/>
   </p:clrMapOvr>
-  <p:timing>
-    <p:tnLst>
-      <p:par>
-        <p:cTn id="1" dur="indefinite" restart="never" nodeType="tmRoot"/>
-      </p:par>
-    </p:tnLst>
-  </p:timing>
 </p:sld>
 </file>
 
@@ -4665,10 +4524,9 @@
           <a:lstStyle/>
           <a:p>
             <a:r>
-              <a:rPr lang="es-CO" dirty="0" smtClean="0"/>
+              <a:rPr lang="es-CO" dirty="0"/>
               <a:t>Variable Objetivo: Pobre</a:t>
             </a:r>
-            <a:endParaRPr lang="es-CO" dirty="0"/>
           </a:p>
         </p:txBody>
       </p:sp>
@@ -4766,7 +4624,16 @@
                         <a:rPr lang="es-CO" i="1" smtClean="0">
                           <a:latin typeface="Cambria Math" panose="02040503050406030204" pitchFamily="18" charset="0"/>
                         </a:rPr>
-                        <m:t>∗(</m:t>
+                        <m:t>∗</m:t>
+                      </m:r>
+                      <m:r>
+                        <m:rPr>
+                          <m:nor/>
+                        </m:rPr>
+                        <a:rPr lang="es-CO" i="1" smtClean="0">
+                          <a:latin typeface="Cambria Math" panose="02040503050406030204" pitchFamily="18" charset="0"/>
+                        </a:rPr>
+                        <m:t>(</m:t>
                       </m:r>
                       <m:r>
                         <m:rPr>
@@ -4867,7 +4734,7 @@
               </a:p>
               <a:p>
                 <a:r>
-                  <a:rPr lang="es-CO" dirty="0" smtClean="0"/>
+                  <a:rPr lang="es-CO" dirty="0"/>
                   <a:t>Donde, </a:t>
                 </a:r>
                 <a14:m>
@@ -4949,7 +4816,13 @@
                               <a:rPr lang="es-CO" b="0" i="1" smtClean="0">
                                 <a:latin typeface="Cambria Math" panose="02040503050406030204" pitchFamily="18" charset="0"/>
                               </a:rPr>
-                              <m:t>1,   </m:t>
+                              <m:t>1</m:t>
+                            </m:r>
+                            <m:r>
+                              <a:rPr lang="es-CO" b="0" i="1" smtClean="0">
+                                <a:latin typeface="Cambria Math" panose="02040503050406030204" pitchFamily="18" charset="0"/>
+                              </a:rPr>
+                              <m:t>,   </m:t>
                             </m:r>
                             <m:r>
                               <a:rPr lang="es-CO" b="0" i="1" smtClean="0">
@@ -5065,7 +4938,13 @@
                               <a:rPr lang="es-CO" b="0" i="1" smtClean="0">
                                 <a:latin typeface="Cambria Math" panose="02040503050406030204" pitchFamily="18" charset="0"/>
                               </a:rPr>
-                              <m:t>0,     </m:t>
+                              <m:t>0</m:t>
+                            </m:r>
+                            <m:r>
+                              <a:rPr lang="es-CO" b="0" i="1" smtClean="0">
+                                <a:latin typeface="Cambria Math" panose="02040503050406030204" pitchFamily="18" charset="0"/>
+                              </a:rPr>
+                              <m:t>,     </m:t>
                             </m:r>
                             <m:r>
                               <a:rPr lang="es-CO" i="1">
@@ -5247,13 +5126,6 @@
   <p:clrMapOvr>
     <a:masterClrMapping/>
   </p:clrMapOvr>
-  <p:timing>
-    <p:tnLst>
-      <p:par>
-        <p:cTn id="1" dur="indefinite" restart="never" nodeType="tmRoot"/>
-      </p:par>
-    </p:tnLst>
-  </p:timing>
 </p:sld>
 </file>
 
